--- a/doc/Meeting preliminary results.pptx
+++ b/doc/Meeting preliminary results.pptx
@@ -14,8 +14,8 @@
     <p:sldId id="262" r:id="rId8"/>
     <p:sldId id="263" r:id="rId9"/>
     <p:sldId id="264" r:id="rId10"/>
-    <p:sldId id="265" r:id="rId11"/>
-    <p:sldId id="266" r:id="rId12"/>
+    <p:sldId id="266" r:id="rId11"/>
+    <p:sldId id="281" r:id="rId12"/>
     <p:sldId id="267" r:id="rId13"/>
     <p:sldId id="268" r:id="rId14"/>
     <p:sldId id="269" r:id="rId15"/>
@@ -27,6 +27,8 @@
     <p:sldId id="274" r:id="rId21"/>
     <p:sldId id="277" r:id="rId22"/>
     <p:sldId id="278" r:id="rId23"/>
+    <p:sldId id="280" r:id="rId24"/>
+    <p:sldId id="279" r:id="rId25"/>
   </p:sldIdLst>
   <p:sldSz cx="12192000" cy="6858000"/>
   <p:notesSz cx="6858000" cy="9144000"/>
@@ -125,6 +127,11 @@
       </a:defRPr>
     </a:lvl9pPr>
   </p:defaultTextStyle>
+  <p:extLst>
+    <p:ext uri="{EFAFB233-063F-42B5-8137-9DF3F51BA10A}">
+      <p15:sldGuideLst xmlns:p15="http://schemas.microsoft.com/office/powerpoint/2012/main"/>
+    </p:ext>
+  </p:extLst>
 </p:presentation>
 </file>
 
@@ -259,7 +266,7 @@
           <a:p>
             <a:fld id="{71E5DE09-DBE0-45AA-A589-DAAA9BBA7830}" type="datetimeFigureOut">
               <a:rPr lang="en-US" smtClean="0"/>
-              <a:t>10/17/2024</a:t>
+              <a:t>10/23/2024</a:t>
             </a:fld>
             <a:endParaRPr lang="en-US"/>
           </a:p>
@@ -429,7 +436,7 @@
           <a:p>
             <a:fld id="{71E5DE09-DBE0-45AA-A589-DAAA9BBA7830}" type="datetimeFigureOut">
               <a:rPr lang="en-US" smtClean="0"/>
-              <a:t>10/17/2024</a:t>
+              <a:t>10/23/2024</a:t>
             </a:fld>
             <a:endParaRPr lang="en-US"/>
           </a:p>
@@ -609,7 +616,7 @@
           <a:p>
             <a:fld id="{71E5DE09-DBE0-45AA-A589-DAAA9BBA7830}" type="datetimeFigureOut">
               <a:rPr lang="en-US" smtClean="0"/>
-              <a:t>10/17/2024</a:t>
+              <a:t>10/23/2024</a:t>
             </a:fld>
             <a:endParaRPr lang="en-US"/>
           </a:p>
@@ -779,7 +786,7 @@
           <a:p>
             <a:fld id="{71E5DE09-DBE0-45AA-A589-DAAA9BBA7830}" type="datetimeFigureOut">
               <a:rPr lang="en-US" smtClean="0"/>
-              <a:t>10/17/2024</a:t>
+              <a:t>10/23/2024</a:t>
             </a:fld>
             <a:endParaRPr lang="en-US"/>
           </a:p>
@@ -1025,7 +1032,7 @@
           <a:p>
             <a:fld id="{71E5DE09-DBE0-45AA-A589-DAAA9BBA7830}" type="datetimeFigureOut">
               <a:rPr lang="en-US" smtClean="0"/>
-              <a:t>10/17/2024</a:t>
+              <a:t>10/23/2024</a:t>
             </a:fld>
             <a:endParaRPr lang="en-US"/>
           </a:p>
@@ -1257,7 +1264,7 @@
           <a:p>
             <a:fld id="{71E5DE09-DBE0-45AA-A589-DAAA9BBA7830}" type="datetimeFigureOut">
               <a:rPr lang="en-US" smtClean="0"/>
-              <a:t>10/17/2024</a:t>
+              <a:t>10/23/2024</a:t>
             </a:fld>
             <a:endParaRPr lang="en-US"/>
           </a:p>
@@ -1624,7 +1631,7 @@
           <a:p>
             <a:fld id="{71E5DE09-DBE0-45AA-A589-DAAA9BBA7830}" type="datetimeFigureOut">
               <a:rPr lang="en-US" smtClean="0"/>
-              <a:t>10/17/2024</a:t>
+              <a:t>10/23/2024</a:t>
             </a:fld>
             <a:endParaRPr lang="en-US"/>
           </a:p>
@@ -1742,7 +1749,7 @@
           <a:p>
             <a:fld id="{71E5DE09-DBE0-45AA-A589-DAAA9BBA7830}" type="datetimeFigureOut">
               <a:rPr lang="en-US" smtClean="0"/>
-              <a:t>10/17/2024</a:t>
+              <a:t>10/23/2024</a:t>
             </a:fld>
             <a:endParaRPr lang="en-US"/>
           </a:p>
@@ -1837,7 +1844,7 @@
           <a:p>
             <a:fld id="{71E5DE09-DBE0-45AA-A589-DAAA9BBA7830}" type="datetimeFigureOut">
               <a:rPr lang="en-US" smtClean="0"/>
-              <a:t>10/17/2024</a:t>
+              <a:t>10/23/2024</a:t>
             </a:fld>
             <a:endParaRPr lang="en-US"/>
           </a:p>
@@ -2114,7 +2121,7 @@
           <a:p>
             <a:fld id="{71E5DE09-DBE0-45AA-A589-DAAA9BBA7830}" type="datetimeFigureOut">
               <a:rPr lang="en-US" smtClean="0"/>
-              <a:t>10/17/2024</a:t>
+              <a:t>10/23/2024</a:t>
             </a:fld>
             <a:endParaRPr lang="en-US"/>
           </a:p>
@@ -2367,7 +2374,7 @@
           <a:p>
             <a:fld id="{71E5DE09-DBE0-45AA-A589-DAAA9BBA7830}" type="datetimeFigureOut">
               <a:rPr lang="en-US" smtClean="0"/>
-              <a:t>10/17/2024</a:t>
+              <a:t>10/23/2024</a:t>
             </a:fld>
             <a:endParaRPr lang="en-US"/>
           </a:p>
@@ -2580,7 +2587,7 @@
           <a:p>
             <a:fld id="{71E5DE09-DBE0-45AA-A589-DAAA9BBA7830}" type="datetimeFigureOut">
               <a:rPr lang="en-US" smtClean="0"/>
-              <a:t>10/17/2024</a:t>
+              <a:t>10/23/2024</a:t>
             </a:fld>
             <a:endParaRPr lang="en-US"/>
           </a:p>
@@ -3079,11 +3086,7 @@
             </a:r>
             <a:r>
               <a:rPr lang="es-ES" dirty="0" smtClean="0"/>
-              <a:t>.</a:t>
-            </a:r>
-            <a:r>
-              <a:rPr lang="es-ES" dirty="0" smtClean="0"/>
-              <a:t>, </a:t>
+              <a:t>., </a:t>
             </a:r>
             <a:r>
               <a:rPr lang="es-ES" dirty="0"/>
@@ -3153,6 +3156,188 @@
       </p:grpSpPr>
       <p:sp>
         <p:nvSpPr>
+          <p:cNvPr id="4" name="Título 1"/>
+          <p:cNvSpPr>
+            <a:spLocks noGrp="1"/>
+          </p:cNvSpPr>
+          <p:nvPr>
+            <p:ph type="title"/>
+          </p:nvPr>
+        </p:nvSpPr>
+        <p:spPr/>
+        <p:txBody>
+          <a:bodyPr/>
+          <a:lstStyle/>
+          <a:p>
+            <a:r>
+              <a:rPr lang="en-US" dirty="0" smtClean="0"/>
+              <a:t>Data exploration:</a:t>
+            </a:r>
+            <a:br>
+              <a:rPr lang="en-US" dirty="0" smtClean="0"/>
+            </a:br>
+            <a:r>
+              <a:rPr lang="en-US" dirty="0" smtClean="0"/>
+              <a:t>Adult plant traits </a:t>
+            </a:r>
+            <a:r>
+              <a:rPr lang="en-US" dirty="0" smtClean="0"/>
+              <a:t>PCA</a:t>
+            </a:r>
+            <a:endParaRPr lang="en-US" dirty="0"/>
+          </a:p>
+        </p:txBody>
+      </p:sp>
+      <p:pic>
+        <p:nvPicPr>
+          <p:cNvPr id="8" name="Marcador de contenido 7"/>
+          <p:cNvPicPr>
+            <a:picLocks noGrp="1" noChangeAspect="1"/>
+          </p:cNvPicPr>
+          <p:nvPr>
+            <p:ph idx="1"/>
+          </p:nvPr>
+        </p:nvPicPr>
+        <p:blipFill>
+          <a:blip r:embed="rId2" cstate="print">
+            <a:extLst>
+              <a:ext uri="{28A0092B-C50C-407E-A947-70E740481C1C}">
+                <a14:useLocalDpi xmlns:a14="http://schemas.microsoft.com/office/drawing/2010/main" val="0"/>
+              </a:ext>
+            </a:extLst>
+          </a:blip>
+          <a:stretch>
+            <a:fillRect/>
+          </a:stretch>
+        </p:blipFill>
+        <p:spPr>
+          <a:xfrm>
+            <a:off x="155391" y="955344"/>
+            <a:ext cx="11718355" cy="5781180"/>
+          </a:xfrm>
+        </p:spPr>
+      </p:pic>
+    </p:spTree>
+    <p:extLst>
+      <p:ext uri="{BB962C8B-B14F-4D97-AF65-F5344CB8AC3E}">
+        <p14:creationId xmlns:p14="http://schemas.microsoft.com/office/powerpoint/2010/main" val="547215890"/>
+      </p:ext>
+    </p:extLst>
+  </p:cSld>
+  <p:clrMapOvr>
+    <a:masterClrMapping/>
+  </p:clrMapOvr>
+</p:sld>
+</file>
+
+<file path=ppt/slides/slide11.xml><?xml version="1.0" encoding="utf-8"?>
+<p:sld xmlns:a="http://schemas.openxmlformats.org/drawingml/2006/main" xmlns:r="http://schemas.openxmlformats.org/officeDocument/2006/relationships" xmlns:p="http://schemas.openxmlformats.org/presentationml/2006/main">
+  <p:cSld>
+    <p:spTree>
+      <p:nvGrpSpPr>
+        <p:cNvPr id="1" name=""/>
+        <p:cNvGrpSpPr/>
+        <p:nvPr/>
+      </p:nvGrpSpPr>
+      <p:grpSpPr>
+        <a:xfrm>
+          <a:off x="0" y="0"/>
+          <a:ext cx="0" cy="0"/>
+          <a:chOff x="0" y="0"/>
+          <a:chExt cx="0" cy="0"/>
+        </a:xfrm>
+      </p:grpSpPr>
+      <p:sp>
+        <p:nvSpPr>
+          <p:cNvPr id="4" name="Título 1"/>
+          <p:cNvSpPr>
+            <a:spLocks noGrp="1"/>
+          </p:cNvSpPr>
+          <p:nvPr>
+            <p:ph type="title"/>
+          </p:nvPr>
+        </p:nvSpPr>
+        <p:spPr/>
+        <p:txBody>
+          <a:bodyPr/>
+          <a:lstStyle/>
+          <a:p>
+            <a:r>
+              <a:rPr lang="en-US" dirty="0" smtClean="0"/>
+              <a:t>Data exploration:</a:t>
+            </a:r>
+            <a:br>
+              <a:rPr lang="en-US" dirty="0" smtClean="0"/>
+            </a:br>
+            <a:r>
+              <a:rPr lang="en-US" dirty="0" smtClean="0"/>
+              <a:t>Traits PCA</a:t>
+            </a:r>
+            <a:endParaRPr lang="en-US" dirty="0"/>
+          </a:p>
+        </p:txBody>
+      </p:sp>
+      <p:pic>
+        <p:nvPicPr>
+          <p:cNvPr id="3" name="Marcador de contenido 2"/>
+          <p:cNvPicPr>
+            <a:picLocks noGrp="1" noChangeAspect="1"/>
+          </p:cNvPicPr>
+          <p:nvPr>
+            <p:ph idx="1"/>
+          </p:nvPr>
+        </p:nvPicPr>
+        <p:blipFill>
+          <a:blip r:embed="rId2" cstate="print">
+            <a:extLst>
+              <a:ext uri="{28A0092B-C50C-407E-A947-70E740481C1C}">
+                <a14:useLocalDpi xmlns:a14="http://schemas.microsoft.com/office/drawing/2010/main" val="0"/>
+              </a:ext>
+            </a:extLst>
+          </a:blip>
+          <a:stretch>
+            <a:fillRect/>
+          </a:stretch>
+        </p:blipFill>
+        <p:spPr>
+          <a:xfrm>
+            <a:off x="327546" y="1392072"/>
+            <a:ext cx="11256369" cy="5351823"/>
+          </a:xfrm>
+        </p:spPr>
+      </p:pic>
+    </p:spTree>
+    <p:extLst>
+      <p:ext uri="{BB962C8B-B14F-4D97-AF65-F5344CB8AC3E}">
+        <p14:creationId xmlns:p14="http://schemas.microsoft.com/office/powerpoint/2010/main" val="1061250432"/>
+      </p:ext>
+    </p:extLst>
+  </p:cSld>
+  <p:clrMapOvr>
+    <a:masterClrMapping/>
+  </p:clrMapOvr>
+</p:sld>
+</file>
+
+<file path=ppt/slides/slide12.xml><?xml version="1.0" encoding="utf-8"?>
+<p:sld xmlns:a="http://schemas.openxmlformats.org/drawingml/2006/main" xmlns:r="http://schemas.openxmlformats.org/officeDocument/2006/relationships" xmlns:p="http://schemas.openxmlformats.org/presentationml/2006/main">
+  <p:cSld>
+    <p:spTree>
+      <p:nvGrpSpPr>
+        <p:cNvPr id="1" name=""/>
+        <p:cNvGrpSpPr/>
+        <p:nvPr/>
+      </p:nvGrpSpPr>
+      <p:grpSpPr>
+        <a:xfrm>
+          <a:off x="0" y="0"/>
+          <a:ext cx="0" cy="0"/>
+          <a:chOff x="0" y="0"/>
+          <a:chExt cx="0" cy="0"/>
+        </a:xfrm>
+      </p:grpSpPr>
+      <p:sp>
+        <p:nvSpPr>
           <p:cNvPr id="2" name="Título 1"/>
           <p:cNvSpPr>
             <a:spLocks noGrp="1"/>
@@ -3168,15 +3353,367 @@
           <a:p>
             <a:r>
               <a:rPr lang="en-US" dirty="0" smtClean="0"/>
-              <a:t>Data exploration:</a:t>
-            </a:r>
-            <a:br>
-              <a:rPr lang="en-US" dirty="0" smtClean="0"/>
-            </a:br>
-            <a:r>
-              <a:rPr lang="en-US" dirty="0" smtClean="0"/>
-              <a:t>Traits PCA</a:t>
-            </a:r>
+              <a:t>1. Germination patterns </a:t>
+            </a:r>
+            <a:r>
+              <a:rPr lang="en-US" sz="2400" dirty="0" smtClean="0"/>
+              <a:t>(Remove or keep in supplementary?)</a:t>
+            </a:r>
+            <a:endParaRPr lang="en-US" dirty="0"/>
+          </a:p>
+        </p:txBody>
+      </p:sp>
+      <p:sp>
+        <p:nvSpPr>
+          <p:cNvPr id="5" name="CuadroTexto 4"/>
+          <p:cNvSpPr txBox="1"/>
+          <p:nvPr/>
+        </p:nvSpPr>
+        <p:spPr>
+          <a:xfrm>
+            <a:off x="8848846" y="3455042"/>
+            <a:ext cx="3090441" cy="1477328"/>
+          </a:xfrm>
+          <a:prstGeom prst="rect">
+            <a:avLst/>
+          </a:prstGeom>
+          <a:noFill/>
+          <a:ln w="38100">
+            <a:solidFill>
+              <a:srgbClr val="FF0000"/>
+            </a:solidFill>
+          </a:ln>
+        </p:spPr>
+        <p:txBody>
+          <a:bodyPr wrap="square" rtlCol="0">
+            <a:spAutoFit/>
+          </a:bodyPr>
+          <a:lstStyle/>
+          <a:p>
+            <a:r>
+              <a:rPr lang="en-US" dirty="0" smtClean="0"/>
+              <a:t>MCMC-GLMMs</a:t>
+            </a:r>
+          </a:p>
+          <a:p>
+            <a:endParaRPr lang="en-US" dirty="0" smtClean="0"/>
+          </a:p>
+          <a:p>
+            <a:r>
+              <a:rPr lang="en-US" dirty="0" smtClean="0"/>
+              <a:t>Consistent lower germination in darkness and water stress</a:t>
+            </a:r>
+          </a:p>
+          <a:p>
+            <a:endParaRPr lang="en-US" dirty="0"/>
+          </a:p>
+        </p:txBody>
+      </p:sp>
+      <p:pic>
+        <p:nvPicPr>
+          <p:cNvPr id="6" name="Imagen 5"/>
+          <p:cNvPicPr>
+            <a:picLocks noChangeAspect="1"/>
+          </p:cNvPicPr>
+          <p:nvPr/>
+        </p:nvPicPr>
+        <p:blipFill>
+          <a:blip r:embed="rId2" cstate="print">
+            <a:extLst>
+              <a:ext uri="{28A0092B-C50C-407E-A947-70E740481C1C}">
+                <a14:useLocalDpi xmlns:a14="http://schemas.microsoft.com/office/drawing/2010/main" val="0"/>
+              </a:ext>
+            </a:extLst>
+          </a:blip>
+          <a:stretch>
+            <a:fillRect/>
+          </a:stretch>
+        </p:blipFill>
+        <p:spPr>
+          <a:xfrm>
+            <a:off x="353482" y="1446663"/>
+            <a:ext cx="8358886" cy="5001904"/>
+          </a:xfrm>
+          <a:prstGeom prst="rect">
+            <a:avLst/>
+          </a:prstGeom>
+        </p:spPr>
+      </p:pic>
+    </p:spTree>
+    <p:extLst>
+      <p:ext uri="{BB962C8B-B14F-4D97-AF65-F5344CB8AC3E}">
+        <p14:creationId xmlns:p14="http://schemas.microsoft.com/office/powerpoint/2010/main" val="2718894467"/>
+      </p:ext>
+    </p:extLst>
+  </p:cSld>
+  <p:clrMapOvr>
+    <a:masterClrMapping/>
+  </p:clrMapOvr>
+</p:sld>
+</file>
+
+<file path=ppt/slides/slide13.xml><?xml version="1.0" encoding="utf-8"?>
+<p:sld xmlns:a="http://schemas.openxmlformats.org/drawingml/2006/main" xmlns:r="http://schemas.openxmlformats.org/officeDocument/2006/relationships" xmlns:p="http://schemas.openxmlformats.org/presentationml/2006/main">
+  <p:cSld>
+    <p:spTree>
+      <p:nvGrpSpPr>
+        <p:cNvPr id="1" name=""/>
+        <p:cNvGrpSpPr/>
+        <p:nvPr/>
+      </p:nvGrpSpPr>
+      <p:grpSpPr>
+        <a:xfrm>
+          <a:off x="0" y="0"/>
+          <a:ext cx="0" cy="0"/>
+          <a:chOff x="0" y="0"/>
+          <a:chExt cx="0" cy="0"/>
+        </a:xfrm>
+      </p:grpSpPr>
+      <p:sp>
+        <p:nvSpPr>
+          <p:cNvPr id="2" name="Título 1"/>
+          <p:cNvSpPr>
+            <a:spLocks noGrp="1"/>
+          </p:cNvSpPr>
+          <p:nvPr>
+            <p:ph type="title"/>
+          </p:nvPr>
+        </p:nvSpPr>
+        <p:spPr/>
+        <p:txBody>
+          <a:bodyPr>
+            <a:normAutofit/>
+          </a:bodyPr>
+          <a:lstStyle/>
+          <a:p>
+            <a:r>
+              <a:rPr lang="en-US" sz="3600" dirty="0" smtClean="0"/>
+              <a:t>2. Community metrics along microclimatic gradients</a:t>
+            </a:r>
+            <a:endParaRPr lang="en-US" sz="3600" dirty="0"/>
+          </a:p>
+        </p:txBody>
+      </p:sp>
+      <p:sp>
+        <p:nvSpPr>
+          <p:cNvPr id="5" name="CuadroTexto 4"/>
+          <p:cNvSpPr txBox="1"/>
+          <p:nvPr/>
+        </p:nvSpPr>
+        <p:spPr>
+          <a:xfrm>
+            <a:off x="9377412" y="1970523"/>
+            <a:ext cx="2551083" cy="3693319"/>
+          </a:xfrm>
+          <a:prstGeom prst="rect">
+            <a:avLst/>
+          </a:prstGeom>
+          <a:noFill/>
+          <a:ln w="38100">
+            <a:solidFill>
+              <a:srgbClr val="FF0000"/>
+            </a:solidFill>
+          </a:ln>
+        </p:spPr>
+        <p:txBody>
+          <a:bodyPr wrap="square" rtlCol="0">
+            <a:spAutoFit/>
+          </a:bodyPr>
+          <a:lstStyle/>
+          <a:p>
+            <a:r>
+              <a:rPr lang="en-US" dirty="0" smtClean="0"/>
+              <a:t>LM estimate + CI</a:t>
+            </a:r>
+          </a:p>
+          <a:p>
+            <a:endParaRPr lang="en-US" dirty="0" smtClean="0"/>
+          </a:p>
+          <a:p>
+            <a:r>
+              <a:rPr lang="en-US" dirty="0" smtClean="0"/>
+              <a:t>CM mostly responds to elevation</a:t>
+            </a:r>
+          </a:p>
+          <a:p>
+            <a:endParaRPr lang="en-US" dirty="0"/>
+          </a:p>
+          <a:p>
+            <a:r>
+              <a:rPr lang="en-US" dirty="0" smtClean="0"/>
+              <a:t>CWM mostly responds to snow, GDD and elevation</a:t>
+            </a:r>
+          </a:p>
+          <a:p>
+            <a:endParaRPr lang="en-US" dirty="0"/>
+          </a:p>
+          <a:p>
+            <a:r>
+              <a:rPr lang="en-US" dirty="0" smtClean="0"/>
+              <a:t>Consistent  germination and plant traits responses </a:t>
+            </a:r>
+            <a:r>
+              <a:rPr lang="en-US" dirty="0" smtClean="0"/>
+              <a:t>mostly in </a:t>
+            </a:r>
+            <a:r>
+              <a:rPr lang="en-US" dirty="0" smtClean="0"/>
+              <a:t>opposite directions!!</a:t>
+            </a:r>
+          </a:p>
+          <a:p>
+            <a:endParaRPr lang="en-US" dirty="0"/>
+          </a:p>
+        </p:txBody>
+      </p:sp>
+      <p:pic>
+        <p:nvPicPr>
+          <p:cNvPr id="6" name="Marcador de contenido 5"/>
+          <p:cNvPicPr>
+            <a:picLocks noGrp="1" noChangeAspect="1"/>
+          </p:cNvPicPr>
+          <p:nvPr>
+            <p:ph idx="1"/>
+          </p:nvPr>
+        </p:nvPicPr>
+        <p:blipFill>
+          <a:blip r:embed="rId2" cstate="print">
+            <a:extLst>
+              <a:ext uri="{28A0092B-C50C-407E-A947-70E740481C1C}">
+                <a14:useLocalDpi xmlns:a14="http://schemas.microsoft.com/office/drawing/2010/main" val="0"/>
+              </a:ext>
+            </a:extLst>
+          </a:blip>
+          <a:stretch>
+            <a:fillRect/>
+          </a:stretch>
+        </p:blipFill>
+        <p:spPr>
+          <a:xfrm>
+            <a:off x="272621" y="1498079"/>
+            <a:ext cx="8999093" cy="4351338"/>
+          </a:xfrm>
+        </p:spPr>
+      </p:pic>
+    </p:spTree>
+    <p:extLst>
+      <p:ext uri="{BB962C8B-B14F-4D97-AF65-F5344CB8AC3E}">
+        <p14:creationId xmlns:p14="http://schemas.microsoft.com/office/powerpoint/2010/main" val="3747278091"/>
+      </p:ext>
+    </p:extLst>
+  </p:cSld>
+  <p:clrMapOvr>
+    <a:masterClrMapping/>
+  </p:clrMapOvr>
+</p:sld>
+</file>
+
+<file path=ppt/slides/slide14.xml><?xml version="1.0" encoding="utf-8"?>
+<p:sld xmlns:a="http://schemas.openxmlformats.org/drawingml/2006/main" xmlns:r="http://schemas.openxmlformats.org/officeDocument/2006/relationships" xmlns:p="http://schemas.openxmlformats.org/presentationml/2006/main">
+  <p:cSld>
+    <p:spTree>
+      <p:nvGrpSpPr>
+        <p:cNvPr id="1" name=""/>
+        <p:cNvGrpSpPr/>
+        <p:nvPr/>
+      </p:nvGrpSpPr>
+      <p:grpSpPr>
+        <a:xfrm>
+          <a:off x="0" y="0"/>
+          <a:ext cx="0" cy="0"/>
+          <a:chOff x="0" y="0"/>
+          <a:chExt cx="0" cy="0"/>
+        </a:xfrm>
+      </p:grpSpPr>
+      <p:sp>
+        <p:nvSpPr>
+          <p:cNvPr id="2" name="Título 1"/>
+          <p:cNvSpPr>
+            <a:spLocks noGrp="1"/>
+          </p:cNvSpPr>
+          <p:nvPr>
+            <p:ph type="title"/>
+          </p:nvPr>
+        </p:nvSpPr>
+        <p:spPr/>
+        <p:txBody>
+          <a:bodyPr>
+            <a:normAutofit/>
+          </a:bodyPr>
+          <a:lstStyle/>
+          <a:p>
+            <a:r>
+              <a:rPr lang="en-US" sz="3600" dirty="0" smtClean="0"/>
+              <a:t>2. Community metrics along microclimatic gradients</a:t>
+            </a:r>
+            <a:endParaRPr lang="en-US" sz="3600" dirty="0"/>
+          </a:p>
+        </p:txBody>
+      </p:sp>
+      <p:sp>
+        <p:nvSpPr>
+          <p:cNvPr id="6" name="CuadroTexto 5"/>
+          <p:cNvSpPr txBox="1"/>
+          <p:nvPr/>
+        </p:nvSpPr>
+        <p:spPr>
+          <a:xfrm>
+            <a:off x="9209773" y="1929645"/>
+            <a:ext cx="2836710" cy="3416320"/>
+          </a:xfrm>
+          <a:prstGeom prst="rect">
+            <a:avLst/>
+          </a:prstGeom>
+          <a:noFill/>
+          <a:ln w="38100">
+            <a:solidFill>
+              <a:srgbClr val="FF0000"/>
+            </a:solidFill>
+          </a:ln>
+        </p:spPr>
+        <p:txBody>
+          <a:bodyPr wrap="square" rtlCol="0">
+            <a:spAutoFit/>
+          </a:bodyPr>
+          <a:lstStyle/>
+          <a:p>
+            <a:r>
+              <a:rPr lang="en-US" dirty="0" smtClean="0"/>
+              <a:t>LM estimate + CI</a:t>
+            </a:r>
+          </a:p>
+          <a:p>
+            <a:endParaRPr lang="en-US" dirty="0" smtClean="0"/>
+          </a:p>
+          <a:p>
+            <a:r>
+              <a:rPr lang="en-US" dirty="0" smtClean="0"/>
+              <a:t>CM mostly responds to elevation, GDD and FDD</a:t>
+            </a:r>
+          </a:p>
+          <a:p>
+            <a:endParaRPr lang="en-US" dirty="0"/>
+          </a:p>
+          <a:p>
+            <a:r>
+              <a:rPr lang="en-US" dirty="0" smtClean="0"/>
+              <a:t>CWM mostly responds to </a:t>
+            </a:r>
+            <a:r>
+              <a:rPr lang="en-US" dirty="0" smtClean="0"/>
+              <a:t>GDD</a:t>
+            </a:r>
+          </a:p>
+          <a:p>
+            <a:endParaRPr lang="en-US" dirty="0"/>
+          </a:p>
+          <a:p>
+            <a:r>
+              <a:rPr lang="en-US" dirty="0" smtClean="0"/>
+              <a:t>Germination and plant traits responses mostly in opposite directions!!</a:t>
+            </a:r>
+          </a:p>
+          <a:p>
             <a:endParaRPr lang="en-US" dirty="0"/>
           </a:p>
         </p:txBody>
@@ -3191,47 +3728,133 @@
             <p:ph idx="1"/>
           </p:nvPr>
         </p:nvPicPr>
-        <p:blipFill rotWithShape="1">
-          <a:blip r:embed="rId2">
+        <p:blipFill>
+          <a:blip r:embed="rId2" cstate="print">
             <a:extLst>
               <a:ext uri="{28A0092B-C50C-407E-A947-70E740481C1C}">
                 <a14:useLocalDpi xmlns:a14="http://schemas.microsoft.com/office/drawing/2010/main" val="0"/>
               </a:ext>
             </a:extLst>
           </a:blip>
-          <a:srcRect l="2825" t="16414" r="6048" b="9289"/>
-          <a:stretch/>
+          <a:stretch>
+            <a:fillRect/>
+          </a:stretch>
         </p:blipFill>
         <p:spPr>
           <a:xfrm>
-            <a:off x="748496" y="2656389"/>
-            <a:ext cx="5347504" cy="3206188"/>
+            <a:off x="210680" y="1462136"/>
+            <a:ext cx="8999093" cy="4351338"/>
           </a:xfrm>
         </p:spPr>
       </p:pic>
+    </p:spTree>
+    <p:extLst>
+      <p:ext uri="{BB962C8B-B14F-4D97-AF65-F5344CB8AC3E}">
+        <p14:creationId xmlns:p14="http://schemas.microsoft.com/office/powerpoint/2010/main" val="2609244817"/>
+      </p:ext>
+    </p:extLst>
+  </p:cSld>
+  <p:clrMapOvr>
+    <a:masterClrMapping/>
+  </p:clrMapOvr>
+</p:sld>
+</file>
+
+<file path=ppt/slides/slide15.xml><?xml version="1.0" encoding="utf-8"?>
+<p:sld xmlns:a="http://schemas.openxmlformats.org/drawingml/2006/main" xmlns:r="http://schemas.openxmlformats.org/officeDocument/2006/relationships" xmlns:p="http://schemas.openxmlformats.org/presentationml/2006/main">
+  <p:cSld>
+    <p:spTree>
+      <p:nvGrpSpPr>
+        <p:cNvPr id="1" name=""/>
+        <p:cNvGrpSpPr/>
+        <p:nvPr/>
+      </p:nvGrpSpPr>
+      <p:grpSpPr>
+        <a:xfrm>
+          <a:off x="0" y="0"/>
+          <a:ext cx="0" cy="0"/>
+          <a:chOff x="0" y="0"/>
+          <a:chExt cx="0" cy="0"/>
+        </a:xfrm>
+      </p:grpSpPr>
+      <p:sp>
+        <p:nvSpPr>
+          <p:cNvPr id="2" name="Título 1"/>
+          <p:cNvSpPr>
+            <a:spLocks noGrp="1"/>
+          </p:cNvSpPr>
+          <p:nvPr>
+            <p:ph type="title"/>
+          </p:nvPr>
+        </p:nvSpPr>
+        <p:spPr/>
+        <p:txBody>
+          <a:bodyPr>
+            <a:normAutofit/>
+          </a:bodyPr>
+          <a:lstStyle/>
+          <a:p>
+            <a:r>
+              <a:rPr lang="en-US" sz="3600" dirty="0" smtClean="0"/>
+              <a:t>3.1 Germination and adult plant niche differentiation </a:t>
+            </a:r>
+            <a:endParaRPr lang="en-US" sz="3600" dirty="0"/>
+          </a:p>
+        </p:txBody>
+      </p:sp>
       <p:pic>
         <p:nvPicPr>
-          <p:cNvPr id="5" name="Imagen 4"/>
+          <p:cNvPr id="7" name="Marcador de contenido 6"/>
           <p:cNvPicPr>
-            <a:picLocks noChangeAspect="1"/>
+            <a:picLocks noGrp="1" noChangeAspect="1"/>
           </p:cNvPicPr>
-          <p:nvPr/>
+          <p:nvPr>
+            <p:ph idx="1"/>
+          </p:nvPr>
         </p:nvPicPr>
-        <p:blipFill rotWithShape="1">
-          <a:blip r:embed="rId3">
+        <p:blipFill>
+          <a:blip r:embed="rId2" cstate="print">
             <a:extLst>
               <a:ext uri="{28A0092B-C50C-407E-A947-70E740481C1C}">
                 <a14:useLocalDpi xmlns:a14="http://schemas.microsoft.com/office/drawing/2010/main" val="0"/>
               </a:ext>
             </a:extLst>
           </a:blip>
-          <a:srcRect l="3221" t="16685" r="6046" b="9153"/>
-          <a:stretch/>
+          <a:stretch>
+            <a:fillRect/>
+          </a:stretch>
         </p:blipFill>
         <p:spPr>
           <a:xfrm>
-            <a:off x="6302415" y="2662176"/>
-            <a:ext cx="5324355" cy="3200401"/>
+            <a:off x="271370" y="1499518"/>
+            <a:ext cx="4353326" cy="4649960"/>
+          </a:xfrm>
+        </p:spPr>
+      </p:pic>
+      <p:pic>
+        <p:nvPicPr>
+          <p:cNvPr id="8" name="Imagen 7"/>
+          <p:cNvPicPr>
+            <a:picLocks noChangeAspect="1"/>
+          </p:cNvPicPr>
+          <p:nvPr/>
+        </p:nvPicPr>
+        <p:blipFill>
+          <a:blip r:embed="rId3" cstate="print">
+            <a:extLst>
+              <a:ext uri="{28A0092B-C50C-407E-A947-70E740481C1C}">
+                <a14:useLocalDpi xmlns:a14="http://schemas.microsoft.com/office/drawing/2010/main" val="0"/>
+              </a:ext>
+            </a:extLst>
+          </a:blip>
+          <a:stretch>
+            <a:fillRect/>
+          </a:stretch>
+        </p:blipFill>
+        <p:spPr>
+          <a:xfrm>
+            <a:off x="4694697" y="1499517"/>
+            <a:ext cx="4349013" cy="4645353"/>
           </a:xfrm>
           <a:prstGeom prst="rect">
             <a:avLst/>
@@ -3240,7 +3863,1807 @@
       </p:pic>
       <p:sp>
         <p:nvSpPr>
-          <p:cNvPr id="6" name="Marcador de contenido 2"/>
+          <p:cNvPr id="9" name="CuadroTexto 8"/>
+          <p:cNvSpPr txBox="1"/>
+          <p:nvPr/>
+        </p:nvSpPr>
+        <p:spPr>
+          <a:xfrm>
+            <a:off x="9209773" y="1929645"/>
+            <a:ext cx="2836710" cy="2862322"/>
+          </a:xfrm>
+          <a:prstGeom prst="rect">
+            <a:avLst/>
+          </a:prstGeom>
+          <a:noFill/>
+          <a:ln w="38100">
+            <a:solidFill>
+              <a:srgbClr val="FF0000"/>
+            </a:solidFill>
+          </a:ln>
+        </p:spPr>
+        <p:txBody>
+          <a:bodyPr wrap="square" rtlCol="0">
+            <a:spAutoFit/>
+          </a:bodyPr>
+          <a:lstStyle/>
+          <a:p>
+            <a:r>
+              <a:rPr lang="en-US" dirty="0" smtClean="0"/>
+              <a:t>Mean + CI (t-test)</a:t>
+            </a:r>
+          </a:p>
+          <a:p>
+            <a:endParaRPr lang="en-US" dirty="0" smtClean="0"/>
+          </a:p>
+          <a:p>
+            <a:r>
+              <a:rPr lang="en-US" dirty="0" smtClean="0"/>
+              <a:t>Germination niche dissimilarity bigger than adult plant niche.</a:t>
+            </a:r>
+          </a:p>
+          <a:p>
+            <a:endParaRPr lang="en-US" dirty="0"/>
+          </a:p>
+          <a:p>
+            <a:r>
+              <a:rPr lang="en-US" dirty="0" smtClean="0"/>
+              <a:t>Both data types significant in mediterranean, only with presence/absence data in temperate. </a:t>
+            </a:r>
+            <a:endParaRPr lang="en-US" dirty="0"/>
+          </a:p>
+        </p:txBody>
+      </p:sp>
+    </p:spTree>
+    <p:extLst>
+      <p:ext uri="{BB962C8B-B14F-4D97-AF65-F5344CB8AC3E}">
+        <p14:creationId xmlns:p14="http://schemas.microsoft.com/office/powerpoint/2010/main" val="3853303510"/>
+      </p:ext>
+    </p:extLst>
+  </p:cSld>
+  <p:clrMapOvr>
+    <a:masterClrMapping/>
+  </p:clrMapOvr>
+</p:sld>
+</file>
+
+<file path=ppt/slides/slide16.xml><?xml version="1.0" encoding="utf-8"?>
+<p:sld xmlns:a="http://schemas.openxmlformats.org/drawingml/2006/main" xmlns:r="http://schemas.openxmlformats.org/officeDocument/2006/relationships" xmlns:p="http://schemas.openxmlformats.org/presentationml/2006/main">
+  <p:cSld>
+    <p:spTree>
+      <p:nvGrpSpPr>
+        <p:cNvPr id="1" name=""/>
+        <p:cNvGrpSpPr/>
+        <p:nvPr/>
+      </p:nvGrpSpPr>
+      <p:grpSpPr>
+        <a:xfrm>
+          <a:off x="0" y="0"/>
+          <a:ext cx="0" cy="0"/>
+          <a:chOff x="0" y="0"/>
+          <a:chExt cx="0" cy="0"/>
+        </a:xfrm>
+      </p:grpSpPr>
+      <p:sp>
+        <p:nvSpPr>
+          <p:cNvPr id="2" name="Título 1"/>
+          <p:cNvSpPr>
+            <a:spLocks noGrp="1"/>
+          </p:cNvSpPr>
+          <p:nvPr>
+            <p:ph type="title"/>
+          </p:nvPr>
+        </p:nvSpPr>
+        <p:spPr/>
+        <p:txBody>
+          <a:bodyPr/>
+          <a:lstStyle/>
+          <a:p>
+            <a:r>
+              <a:rPr lang="en-US" dirty="0" smtClean="0"/>
+              <a:t>3.2 FD along microclimatic gradients</a:t>
+            </a:r>
+            <a:endParaRPr lang="en-US" dirty="0"/>
+          </a:p>
+        </p:txBody>
+      </p:sp>
+      <p:sp>
+        <p:nvSpPr>
+          <p:cNvPr id="5" name="CuadroTexto 4"/>
+          <p:cNvSpPr txBox="1"/>
+          <p:nvPr/>
+        </p:nvSpPr>
+        <p:spPr>
+          <a:xfrm>
+            <a:off x="8364663" y="2132202"/>
+            <a:ext cx="3036399" cy="3139321"/>
+          </a:xfrm>
+          <a:prstGeom prst="rect">
+            <a:avLst/>
+          </a:prstGeom>
+          <a:noFill/>
+          <a:ln w="38100">
+            <a:solidFill>
+              <a:srgbClr val="FF0000"/>
+            </a:solidFill>
+          </a:ln>
+        </p:spPr>
+        <p:txBody>
+          <a:bodyPr wrap="square" rtlCol="0">
+            <a:spAutoFit/>
+          </a:bodyPr>
+          <a:lstStyle/>
+          <a:p>
+            <a:r>
+              <a:rPr lang="en-US" dirty="0" smtClean="0"/>
+              <a:t>LM parameter + CI </a:t>
+            </a:r>
+          </a:p>
+          <a:p>
+            <a:endParaRPr lang="en-US" dirty="0" smtClean="0"/>
+          </a:p>
+          <a:p>
+            <a:r>
+              <a:rPr lang="en-US" dirty="0" smtClean="0"/>
+              <a:t>Opposite trait differentiation trends between germination and adult plant niche. </a:t>
+            </a:r>
+          </a:p>
+          <a:p>
+            <a:endParaRPr lang="en-US" dirty="0"/>
+          </a:p>
+          <a:p>
+            <a:r>
+              <a:rPr lang="en-US" dirty="0" smtClean="0"/>
+              <a:t>Snow = germination divergent, plant convergent</a:t>
+            </a:r>
+          </a:p>
+          <a:p>
+            <a:endParaRPr lang="en-US" dirty="0"/>
+          </a:p>
+          <a:p>
+            <a:r>
+              <a:rPr lang="en-US" dirty="0" smtClean="0"/>
+              <a:t>Elevation = germination convergent, plant divergent</a:t>
+            </a:r>
+          </a:p>
+        </p:txBody>
+      </p:sp>
+      <p:pic>
+        <p:nvPicPr>
+          <p:cNvPr id="8" name="Marcador de contenido 7"/>
+          <p:cNvPicPr>
+            <a:picLocks noGrp="1" noChangeAspect="1"/>
+          </p:cNvPicPr>
+          <p:nvPr>
+            <p:ph idx="1"/>
+          </p:nvPr>
+        </p:nvPicPr>
+        <p:blipFill>
+          <a:blip r:embed="rId2" cstate="print">
+            <a:extLst>
+              <a:ext uri="{28A0092B-C50C-407E-A947-70E740481C1C}">
+                <a14:useLocalDpi xmlns:a14="http://schemas.microsoft.com/office/drawing/2010/main" val="0"/>
+              </a:ext>
+            </a:extLst>
+          </a:blip>
+          <a:stretch>
+            <a:fillRect/>
+          </a:stretch>
+        </p:blipFill>
+        <p:spPr>
+          <a:xfrm>
+            <a:off x="40944" y="1526193"/>
+            <a:ext cx="8217557" cy="4351338"/>
+          </a:xfrm>
+        </p:spPr>
+      </p:pic>
+    </p:spTree>
+    <p:extLst>
+      <p:ext uri="{BB962C8B-B14F-4D97-AF65-F5344CB8AC3E}">
+        <p14:creationId xmlns:p14="http://schemas.microsoft.com/office/powerpoint/2010/main" val="570511265"/>
+      </p:ext>
+    </p:extLst>
+  </p:cSld>
+  <p:clrMapOvr>
+    <a:masterClrMapping/>
+  </p:clrMapOvr>
+</p:sld>
+</file>
+
+<file path=ppt/slides/slide17.xml><?xml version="1.0" encoding="utf-8"?>
+<p:sld xmlns:a="http://schemas.openxmlformats.org/drawingml/2006/main" xmlns:r="http://schemas.openxmlformats.org/officeDocument/2006/relationships" xmlns:p="http://schemas.openxmlformats.org/presentationml/2006/main">
+  <p:cSld>
+    <p:spTree>
+      <p:nvGrpSpPr>
+        <p:cNvPr id="1" name=""/>
+        <p:cNvGrpSpPr/>
+        <p:nvPr/>
+      </p:nvGrpSpPr>
+      <p:grpSpPr>
+        <a:xfrm>
+          <a:off x="0" y="0"/>
+          <a:ext cx="0" cy="0"/>
+          <a:chOff x="0" y="0"/>
+          <a:chExt cx="0" cy="0"/>
+        </a:xfrm>
+      </p:grpSpPr>
+      <p:sp>
+        <p:nvSpPr>
+          <p:cNvPr id="2" name="Título 1"/>
+          <p:cNvSpPr>
+            <a:spLocks noGrp="1"/>
+          </p:cNvSpPr>
+          <p:nvPr>
+            <p:ph type="title"/>
+          </p:nvPr>
+        </p:nvSpPr>
+        <p:spPr/>
+        <p:txBody>
+          <a:bodyPr/>
+          <a:lstStyle/>
+          <a:p>
+            <a:r>
+              <a:rPr lang="en-US" dirty="0" smtClean="0"/>
+              <a:t>3.2 FD along microclimatic gradients</a:t>
+            </a:r>
+            <a:endParaRPr lang="en-US" dirty="0"/>
+          </a:p>
+        </p:txBody>
+      </p:sp>
+      <p:sp>
+        <p:nvSpPr>
+          <p:cNvPr id="8" name="CuadroTexto 7"/>
+          <p:cNvSpPr txBox="1"/>
+          <p:nvPr/>
+        </p:nvSpPr>
+        <p:spPr>
+          <a:xfrm>
+            <a:off x="7838015" y="2320128"/>
+            <a:ext cx="3620921" cy="2862322"/>
+          </a:xfrm>
+          <a:prstGeom prst="rect">
+            <a:avLst/>
+          </a:prstGeom>
+          <a:noFill/>
+          <a:ln w="38100">
+            <a:solidFill>
+              <a:srgbClr val="FF0000"/>
+            </a:solidFill>
+          </a:ln>
+        </p:spPr>
+        <p:txBody>
+          <a:bodyPr wrap="square" rtlCol="0">
+            <a:spAutoFit/>
+          </a:bodyPr>
+          <a:lstStyle/>
+          <a:p>
+            <a:r>
+              <a:rPr lang="en-US" dirty="0" smtClean="0"/>
+              <a:t>LM parameter + CI </a:t>
+            </a:r>
+          </a:p>
+          <a:p>
+            <a:endParaRPr lang="en-US" dirty="0" smtClean="0"/>
+          </a:p>
+          <a:p>
+            <a:r>
+              <a:rPr lang="en-US" dirty="0" smtClean="0"/>
+              <a:t>Opposite trait differentiation trends between germination and adult plant niche. </a:t>
+            </a:r>
+          </a:p>
+          <a:p>
+            <a:endParaRPr lang="en-US" dirty="0"/>
+          </a:p>
+          <a:p>
+            <a:r>
+              <a:rPr lang="en-US" dirty="0" smtClean="0"/>
+              <a:t>GDD = germination convergent, plant divergent</a:t>
+            </a:r>
+          </a:p>
+          <a:p>
+            <a:endParaRPr lang="en-US" dirty="0"/>
+          </a:p>
+          <a:p>
+            <a:r>
+              <a:rPr lang="en-US" dirty="0" smtClean="0"/>
+              <a:t>Elevation = germination divergent</a:t>
+            </a:r>
+          </a:p>
+        </p:txBody>
+      </p:sp>
+      <p:pic>
+        <p:nvPicPr>
+          <p:cNvPr id="4" name="Marcador de contenido 3"/>
+          <p:cNvPicPr>
+            <a:picLocks noGrp="1" noChangeAspect="1"/>
+          </p:cNvPicPr>
+          <p:nvPr>
+            <p:ph idx="1"/>
+          </p:nvPr>
+        </p:nvPicPr>
+        <p:blipFill>
+          <a:blip r:embed="rId2" cstate="print">
+            <a:extLst>
+              <a:ext uri="{28A0092B-C50C-407E-A947-70E740481C1C}">
+                <a14:useLocalDpi xmlns:a14="http://schemas.microsoft.com/office/drawing/2010/main" val="0"/>
+              </a:ext>
+            </a:extLst>
+          </a:blip>
+          <a:stretch>
+            <a:fillRect/>
+          </a:stretch>
+        </p:blipFill>
+        <p:spPr>
+          <a:xfrm>
+            <a:off x="66393" y="1690688"/>
+            <a:ext cx="7451859" cy="4710112"/>
+          </a:xfrm>
+        </p:spPr>
+      </p:pic>
+    </p:spTree>
+    <p:extLst>
+      <p:ext uri="{BB962C8B-B14F-4D97-AF65-F5344CB8AC3E}">
+        <p14:creationId xmlns:p14="http://schemas.microsoft.com/office/powerpoint/2010/main" val="1103088524"/>
+      </p:ext>
+    </p:extLst>
+  </p:cSld>
+  <p:clrMapOvr>
+    <a:masterClrMapping/>
+  </p:clrMapOvr>
+</p:sld>
+</file>
+
+<file path=ppt/slides/slide18.xml><?xml version="1.0" encoding="utf-8"?>
+<p:sld xmlns:a="http://schemas.openxmlformats.org/drawingml/2006/main" xmlns:r="http://schemas.openxmlformats.org/officeDocument/2006/relationships" xmlns:p="http://schemas.openxmlformats.org/presentationml/2006/main">
+  <p:cSld>
+    <p:spTree>
+      <p:nvGrpSpPr>
+        <p:cNvPr id="1" name=""/>
+        <p:cNvGrpSpPr/>
+        <p:nvPr/>
+      </p:nvGrpSpPr>
+      <p:grpSpPr>
+        <a:xfrm>
+          <a:off x="0" y="0"/>
+          <a:ext cx="0" cy="0"/>
+          <a:chOff x="0" y="0"/>
+          <a:chExt cx="0" cy="0"/>
+        </a:xfrm>
+      </p:grpSpPr>
+      <p:sp>
+        <p:nvSpPr>
+          <p:cNvPr id="2" name="Título 1"/>
+          <p:cNvSpPr>
+            <a:spLocks noGrp="1"/>
+          </p:cNvSpPr>
+          <p:nvPr>
+            <p:ph type="title"/>
+          </p:nvPr>
+        </p:nvSpPr>
+        <p:spPr/>
+        <p:txBody>
+          <a:bodyPr/>
+          <a:lstStyle/>
+          <a:p>
+            <a:r>
+              <a:rPr lang="en-US" dirty="0" smtClean="0"/>
+              <a:t>Answers to Objectives</a:t>
+            </a:r>
+            <a:endParaRPr lang="en-US" dirty="0"/>
+          </a:p>
+        </p:txBody>
+      </p:sp>
+      <p:sp>
+        <p:nvSpPr>
+          <p:cNvPr id="3" name="Marcador de contenido 2"/>
+          <p:cNvSpPr>
+            <a:spLocks noGrp="1"/>
+          </p:cNvSpPr>
+          <p:nvPr>
+            <p:ph idx="1"/>
+          </p:nvPr>
+        </p:nvSpPr>
+        <p:spPr/>
+        <p:txBody>
+          <a:bodyPr>
+            <a:normAutofit/>
+          </a:bodyPr>
+          <a:lstStyle/>
+          <a:p>
+            <a:pPr marL="514350" indent="-514350">
+              <a:buFont typeface="+mj-lt"/>
+              <a:buAutoNum type="arabicPeriod"/>
+            </a:pPr>
+            <a:r>
+              <a:rPr lang="en-US" dirty="0" smtClean="0">
+                <a:solidFill>
+                  <a:schemeClr val="bg2">
+                    <a:lumMod val="75000"/>
+                  </a:schemeClr>
+                </a:solidFill>
+              </a:rPr>
+              <a:t>Determine germination patterns to main drivers in alpine communities</a:t>
+            </a:r>
+          </a:p>
+          <a:p>
+            <a:pPr marL="0" indent="0">
+              <a:buNone/>
+            </a:pPr>
+            <a:endParaRPr lang="en-US" dirty="0"/>
+          </a:p>
+          <a:p>
+            <a:pPr marL="0" indent="0">
+              <a:buNone/>
+            </a:pPr>
+            <a:r>
+              <a:rPr lang="en-US" dirty="0" smtClean="0"/>
+              <a:t>Significantly worse germination in darkness and water stress</a:t>
+            </a:r>
+          </a:p>
+          <a:p>
+            <a:pPr marL="0" indent="0">
+              <a:buNone/>
+            </a:pPr>
+            <a:r>
+              <a:rPr lang="en-US" dirty="0" smtClean="0"/>
+              <a:t>Trend of higher germination in constant temperatures (probably because lower limit of alternating temperatures slowed germination speed or is below germination threshold).</a:t>
+            </a:r>
+          </a:p>
+          <a:p>
+            <a:pPr marL="457200" lvl="1" indent="0">
+              <a:buNone/>
+            </a:pPr>
+            <a:endParaRPr lang="en-US" dirty="0"/>
+          </a:p>
+        </p:txBody>
+      </p:sp>
+    </p:spTree>
+    <p:extLst>
+      <p:ext uri="{BB962C8B-B14F-4D97-AF65-F5344CB8AC3E}">
+        <p14:creationId xmlns:p14="http://schemas.microsoft.com/office/powerpoint/2010/main" val="554017038"/>
+      </p:ext>
+    </p:extLst>
+  </p:cSld>
+  <p:clrMapOvr>
+    <a:masterClrMapping/>
+  </p:clrMapOvr>
+</p:sld>
+</file>
+
+<file path=ppt/slides/slide19.xml><?xml version="1.0" encoding="utf-8"?>
+<p:sld xmlns:a="http://schemas.openxmlformats.org/drawingml/2006/main" xmlns:r="http://schemas.openxmlformats.org/officeDocument/2006/relationships" xmlns:p="http://schemas.openxmlformats.org/presentationml/2006/main">
+  <p:cSld>
+    <p:spTree>
+      <p:nvGrpSpPr>
+        <p:cNvPr id="1" name=""/>
+        <p:cNvGrpSpPr/>
+        <p:nvPr/>
+      </p:nvGrpSpPr>
+      <p:grpSpPr>
+        <a:xfrm>
+          <a:off x="0" y="0"/>
+          <a:ext cx="0" cy="0"/>
+          <a:chOff x="0" y="0"/>
+          <a:chExt cx="0" cy="0"/>
+        </a:xfrm>
+      </p:grpSpPr>
+      <p:sp>
+        <p:nvSpPr>
+          <p:cNvPr id="2" name="Título 1"/>
+          <p:cNvSpPr>
+            <a:spLocks noGrp="1"/>
+          </p:cNvSpPr>
+          <p:nvPr>
+            <p:ph type="title"/>
+          </p:nvPr>
+        </p:nvSpPr>
+        <p:spPr/>
+        <p:txBody>
+          <a:bodyPr/>
+          <a:lstStyle/>
+          <a:p>
+            <a:r>
+              <a:rPr lang="en-US" dirty="0" smtClean="0"/>
+              <a:t>Answers to Objectives</a:t>
+            </a:r>
+            <a:endParaRPr lang="en-US" dirty="0"/>
+          </a:p>
+        </p:txBody>
+      </p:sp>
+      <p:sp>
+        <p:nvSpPr>
+          <p:cNvPr id="3" name="Marcador de contenido 2"/>
+          <p:cNvSpPr>
+            <a:spLocks noGrp="1"/>
+          </p:cNvSpPr>
+          <p:nvPr>
+            <p:ph idx="1"/>
+          </p:nvPr>
+        </p:nvSpPr>
+        <p:spPr/>
+        <p:txBody>
+          <a:bodyPr>
+            <a:normAutofit fontScale="92500" lnSpcReduction="20000"/>
+          </a:bodyPr>
+          <a:lstStyle/>
+          <a:p>
+            <a:pPr marL="0" indent="0">
+              <a:buNone/>
+            </a:pPr>
+            <a:r>
+              <a:rPr lang="en-US" dirty="0" smtClean="0">
+                <a:solidFill>
+                  <a:schemeClr val="bg2">
+                    <a:lumMod val="75000"/>
+                  </a:schemeClr>
+                </a:solidFill>
+              </a:rPr>
+              <a:t>2. Explore relationships between CM/CWM and microclimatic gradients</a:t>
+            </a:r>
+          </a:p>
+          <a:p>
+            <a:pPr marL="0" indent="0">
+              <a:buNone/>
+            </a:pPr>
+            <a:endParaRPr lang="en-US" dirty="0">
+              <a:solidFill>
+                <a:schemeClr val="bg2">
+                  <a:lumMod val="75000"/>
+                </a:schemeClr>
+              </a:solidFill>
+            </a:endParaRPr>
+          </a:p>
+          <a:p>
+            <a:pPr marL="0" indent="0">
+              <a:buNone/>
+            </a:pPr>
+            <a:r>
+              <a:rPr lang="en-US" dirty="0" smtClean="0"/>
+              <a:t>Different responses in each community probably due to distinct environmental limitations (some even opposite).</a:t>
+            </a:r>
+          </a:p>
+          <a:p>
+            <a:pPr marL="0" indent="0">
+              <a:buNone/>
+            </a:pPr>
+            <a:r>
+              <a:rPr lang="en-US" dirty="0" smtClean="0"/>
+              <a:t>Different responses depending on CM or CWM</a:t>
+            </a:r>
+          </a:p>
+          <a:p>
+            <a:pPr marL="0" indent="0">
+              <a:buNone/>
+            </a:pPr>
+            <a:endParaRPr lang="en-US" dirty="0"/>
+          </a:p>
+          <a:p>
+            <a:pPr marL="0" indent="0">
+              <a:buNone/>
+            </a:pPr>
+            <a:r>
+              <a:rPr lang="en-US" dirty="0" smtClean="0"/>
+              <a:t>CM mostly respond to elevation (with only 100-200 m range)</a:t>
+            </a:r>
+          </a:p>
+          <a:p>
+            <a:pPr marL="0" indent="0">
+              <a:buNone/>
+            </a:pPr>
+            <a:r>
+              <a:rPr lang="en-US" dirty="0" smtClean="0"/>
+              <a:t>CWM to snow and GDD in mediterranean, only GDD in temperate</a:t>
+            </a:r>
+          </a:p>
+          <a:p>
+            <a:pPr marL="0" indent="0">
+              <a:buNone/>
+            </a:pPr>
+            <a:endParaRPr lang="en-US" dirty="0"/>
+          </a:p>
+          <a:p>
+            <a:pPr marL="0" indent="0">
+              <a:buNone/>
+            </a:pPr>
+            <a:r>
+              <a:rPr lang="en-US" dirty="0" smtClean="0"/>
+              <a:t>Opposite germination and adult plant relationships with environment (always in mediterranean, mostly in temperate)</a:t>
+            </a:r>
+            <a:endParaRPr lang="en-US" dirty="0"/>
+          </a:p>
+        </p:txBody>
+      </p:sp>
+    </p:spTree>
+    <p:extLst>
+      <p:ext uri="{BB962C8B-B14F-4D97-AF65-F5344CB8AC3E}">
+        <p14:creationId xmlns:p14="http://schemas.microsoft.com/office/powerpoint/2010/main" val="3478497478"/>
+      </p:ext>
+    </p:extLst>
+  </p:cSld>
+  <p:clrMapOvr>
+    <a:masterClrMapping/>
+  </p:clrMapOvr>
+</p:sld>
+</file>
+
+<file path=ppt/slides/slide2.xml><?xml version="1.0" encoding="utf-8"?>
+<p:sld xmlns:a="http://schemas.openxmlformats.org/drawingml/2006/main" xmlns:r="http://schemas.openxmlformats.org/officeDocument/2006/relationships" xmlns:p="http://schemas.openxmlformats.org/presentationml/2006/main">
+  <p:cSld>
+    <p:spTree>
+      <p:nvGrpSpPr>
+        <p:cNvPr id="1" name=""/>
+        <p:cNvGrpSpPr/>
+        <p:nvPr/>
+      </p:nvGrpSpPr>
+      <p:grpSpPr>
+        <a:xfrm>
+          <a:off x="0" y="0"/>
+          <a:ext cx="0" cy="0"/>
+          <a:chOff x="0" y="0"/>
+          <a:chExt cx="0" cy="0"/>
+        </a:xfrm>
+      </p:grpSpPr>
+      <p:sp>
+        <p:nvSpPr>
+          <p:cNvPr id="2" name="Título 1"/>
+          <p:cNvSpPr>
+            <a:spLocks noGrp="1"/>
+          </p:cNvSpPr>
+          <p:nvPr>
+            <p:ph type="title"/>
+          </p:nvPr>
+        </p:nvSpPr>
+        <p:spPr/>
+        <p:txBody>
+          <a:bodyPr/>
+          <a:lstStyle/>
+          <a:p>
+            <a:r>
+              <a:rPr lang="en-US" dirty="0" smtClean="0"/>
+              <a:t>Main introductory points</a:t>
+            </a:r>
+            <a:endParaRPr lang="en-US" dirty="0"/>
+          </a:p>
+        </p:txBody>
+      </p:sp>
+      <p:sp>
+        <p:nvSpPr>
+          <p:cNvPr id="3" name="Marcador de contenido 2"/>
+          <p:cNvSpPr>
+            <a:spLocks noGrp="1"/>
+          </p:cNvSpPr>
+          <p:nvPr>
+            <p:ph idx="1"/>
+          </p:nvPr>
+        </p:nvSpPr>
+        <p:spPr>
+          <a:xfrm>
+            <a:off x="838200" y="1559408"/>
+            <a:ext cx="10515600" cy="4351338"/>
+          </a:xfrm>
+        </p:spPr>
+        <p:txBody>
+          <a:bodyPr/>
+          <a:lstStyle/>
+          <a:p>
+            <a:r>
+              <a:rPr lang="en-US" dirty="0" smtClean="0"/>
+              <a:t>High alpine diversity partly due to niche differentiation </a:t>
+            </a:r>
+          </a:p>
+          <a:p>
+            <a:pPr marL="0" indent="0">
+              <a:buNone/>
+            </a:pPr>
+            <a:endParaRPr lang="en-US" dirty="0" smtClean="0"/>
+          </a:p>
+          <a:p>
+            <a:r>
+              <a:rPr lang="en-US" dirty="0" smtClean="0"/>
+              <a:t>Niche differentiation expected mainly due to harsh environment</a:t>
+            </a:r>
+          </a:p>
+          <a:p>
+            <a:pPr marL="0" indent="0">
+              <a:buNone/>
+            </a:pPr>
+            <a:endParaRPr lang="en-US" dirty="0" smtClean="0"/>
+          </a:p>
+          <a:p>
+            <a:r>
+              <a:rPr lang="en-US" dirty="0" smtClean="0"/>
+              <a:t>Other studies focused on niche-based processes using traits/phylogeny</a:t>
+            </a:r>
+          </a:p>
+          <a:p>
+            <a:pPr marL="0" indent="0">
+              <a:buNone/>
+            </a:pPr>
+            <a:endParaRPr lang="en-US" dirty="0" smtClean="0"/>
+          </a:p>
+          <a:p>
+            <a:r>
+              <a:rPr lang="en-US" dirty="0" smtClean="0"/>
+              <a:t>Regeneration traits hardly considered, only seed mass, BUT….</a:t>
+            </a:r>
+          </a:p>
+          <a:p>
+            <a:pPr marL="0" indent="0">
+              <a:buNone/>
+            </a:pPr>
+            <a:endParaRPr lang="en-US" dirty="0"/>
+          </a:p>
+        </p:txBody>
+      </p:sp>
+    </p:spTree>
+    <p:extLst>
+      <p:ext uri="{BB962C8B-B14F-4D97-AF65-F5344CB8AC3E}">
+        <p14:creationId xmlns:p14="http://schemas.microsoft.com/office/powerpoint/2010/main" val="3843949688"/>
+      </p:ext>
+    </p:extLst>
+  </p:cSld>
+  <p:clrMapOvr>
+    <a:masterClrMapping/>
+  </p:clrMapOvr>
+</p:sld>
+</file>
+
+<file path=ppt/slides/slide20.xml><?xml version="1.0" encoding="utf-8"?>
+<p:sld xmlns:a="http://schemas.openxmlformats.org/drawingml/2006/main" xmlns:r="http://schemas.openxmlformats.org/officeDocument/2006/relationships" xmlns:p="http://schemas.openxmlformats.org/presentationml/2006/main">
+  <p:cSld>
+    <p:spTree>
+      <p:nvGrpSpPr>
+        <p:cNvPr id="1" name=""/>
+        <p:cNvGrpSpPr/>
+        <p:nvPr/>
+      </p:nvGrpSpPr>
+      <p:grpSpPr>
+        <a:xfrm>
+          <a:off x="0" y="0"/>
+          <a:ext cx="0" cy="0"/>
+          <a:chOff x="0" y="0"/>
+          <a:chExt cx="0" cy="0"/>
+        </a:xfrm>
+      </p:grpSpPr>
+      <p:sp>
+        <p:nvSpPr>
+          <p:cNvPr id="2" name="Título 1"/>
+          <p:cNvSpPr>
+            <a:spLocks noGrp="1"/>
+          </p:cNvSpPr>
+          <p:nvPr>
+            <p:ph type="title"/>
+          </p:nvPr>
+        </p:nvSpPr>
+        <p:spPr/>
+        <p:txBody>
+          <a:bodyPr/>
+          <a:lstStyle/>
+          <a:p>
+            <a:r>
+              <a:rPr lang="en-US" dirty="0" smtClean="0"/>
+              <a:t>Answers to Objectives</a:t>
+            </a:r>
+            <a:endParaRPr lang="en-US" dirty="0"/>
+          </a:p>
+        </p:txBody>
+      </p:sp>
+      <p:sp>
+        <p:nvSpPr>
+          <p:cNvPr id="3" name="Marcador de contenido 2"/>
+          <p:cNvSpPr>
+            <a:spLocks noGrp="1"/>
+          </p:cNvSpPr>
+          <p:nvPr>
+            <p:ph idx="1"/>
+          </p:nvPr>
+        </p:nvSpPr>
+        <p:spPr/>
+        <p:txBody>
+          <a:bodyPr>
+            <a:normAutofit/>
+          </a:bodyPr>
+          <a:lstStyle/>
+          <a:p>
+            <a:pPr marL="0" indent="0">
+              <a:buNone/>
+            </a:pPr>
+            <a:r>
+              <a:rPr lang="en-US" dirty="0" smtClean="0">
+                <a:solidFill>
+                  <a:schemeClr val="bg2">
+                    <a:lumMod val="75000"/>
+                  </a:schemeClr>
+                </a:solidFill>
+              </a:rPr>
+              <a:t>3.1. Compare germination and adult plant niche dissimilarities</a:t>
+            </a:r>
+          </a:p>
+          <a:p>
+            <a:pPr marL="0" indent="0">
+              <a:buNone/>
+            </a:pPr>
+            <a:endParaRPr lang="en-US" dirty="0" smtClean="0"/>
+          </a:p>
+          <a:p>
+            <a:pPr marL="0" indent="0">
+              <a:buNone/>
+            </a:pPr>
+            <a:r>
+              <a:rPr lang="en-US" dirty="0" smtClean="0"/>
+              <a:t>Germination niche dissimilarity bigger than adult plant niche (corroborating Grubb’s hypothesis)</a:t>
+            </a:r>
+          </a:p>
+          <a:p>
+            <a:endParaRPr lang="en-US" dirty="0" smtClean="0"/>
+          </a:p>
+          <a:p>
+            <a:pPr marL="0" indent="0">
+              <a:buNone/>
+            </a:pPr>
+            <a:r>
+              <a:rPr lang="en-US" dirty="0" smtClean="0"/>
+              <a:t>Both data types significant in mediterranean, only with presence/absence data in temperate. </a:t>
+            </a:r>
+          </a:p>
+          <a:p>
+            <a:pPr marL="0" indent="0">
+              <a:buNone/>
+            </a:pPr>
+            <a:endParaRPr lang="en-US" dirty="0" smtClean="0"/>
+          </a:p>
+        </p:txBody>
+      </p:sp>
+    </p:spTree>
+    <p:extLst>
+      <p:ext uri="{BB962C8B-B14F-4D97-AF65-F5344CB8AC3E}">
+        <p14:creationId xmlns:p14="http://schemas.microsoft.com/office/powerpoint/2010/main" val="265753111"/>
+      </p:ext>
+    </p:extLst>
+  </p:cSld>
+  <p:clrMapOvr>
+    <a:masterClrMapping/>
+  </p:clrMapOvr>
+</p:sld>
+</file>
+
+<file path=ppt/slides/slide21.xml><?xml version="1.0" encoding="utf-8"?>
+<p:sld xmlns:a="http://schemas.openxmlformats.org/drawingml/2006/main" xmlns:r="http://schemas.openxmlformats.org/officeDocument/2006/relationships" xmlns:p="http://schemas.openxmlformats.org/presentationml/2006/main">
+  <p:cSld>
+    <p:spTree>
+      <p:nvGrpSpPr>
+        <p:cNvPr id="1" name=""/>
+        <p:cNvGrpSpPr/>
+        <p:nvPr/>
+      </p:nvGrpSpPr>
+      <p:grpSpPr>
+        <a:xfrm>
+          <a:off x="0" y="0"/>
+          <a:ext cx="0" cy="0"/>
+          <a:chOff x="0" y="0"/>
+          <a:chExt cx="0" cy="0"/>
+        </a:xfrm>
+      </p:grpSpPr>
+      <p:sp>
+        <p:nvSpPr>
+          <p:cNvPr id="2" name="Título 1"/>
+          <p:cNvSpPr>
+            <a:spLocks noGrp="1"/>
+          </p:cNvSpPr>
+          <p:nvPr>
+            <p:ph type="title"/>
+          </p:nvPr>
+        </p:nvSpPr>
+        <p:spPr/>
+        <p:txBody>
+          <a:bodyPr/>
+          <a:lstStyle/>
+          <a:p>
+            <a:r>
+              <a:rPr lang="en-US" dirty="0" smtClean="0"/>
+              <a:t>Answers to Objectives</a:t>
+            </a:r>
+            <a:endParaRPr lang="en-US" dirty="0"/>
+          </a:p>
+        </p:txBody>
+      </p:sp>
+      <p:sp>
+        <p:nvSpPr>
+          <p:cNvPr id="3" name="Marcador de contenido 2"/>
+          <p:cNvSpPr>
+            <a:spLocks noGrp="1"/>
+          </p:cNvSpPr>
+          <p:nvPr>
+            <p:ph idx="1"/>
+          </p:nvPr>
+        </p:nvSpPr>
+        <p:spPr/>
+        <p:txBody>
+          <a:bodyPr>
+            <a:normAutofit lnSpcReduction="10000"/>
+          </a:bodyPr>
+          <a:lstStyle/>
+          <a:p>
+            <a:pPr marL="0" indent="0">
+              <a:buNone/>
+            </a:pPr>
+            <a:r>
+              <a:rPr lang="en-US" dirty="0" smtClean="0">
+                <a:solidFill>
+                  <a:schemeClr val="bg2">
+                    <a:lumMod val="75000"/>
+                  </a:schemeClr>
+                </a:solidFill>
+              </a:rPr>
+              <a:t>3.2. Relationships between FD and microclimatic gradients</a:t>
+            </a:r>
+          </a:p>
+          <a:p>
+            <a:pPr marL="0" indent="0">
+              <a:buNone/>
+            </a:pPr>
+            <a:r>
+              <a:rPr lang="en-US" dirty="0" smtClean="0"/>
+              <a:t>Opposite trait differentiation trends between germination and adult plant niche. </a:t>
+            </a:r>
+          </a:p>
+          <a:p>
+            <a:endParaRPr lang="en-US" dirty="0" smtClean="0"/>
+          </a:p>
+          <a:p>
+            <a:pPr marL="0" indent="0">
+              <a:buNone/>
+            </a:pPr>
+            <a:r>
+              <a:rPr lang="en-US" dirty="0" smtClean="0"/>
+              <a:t>Snow = germination divergent, plant convergent (Mediterranean)</a:t>
+            </a:r>
+          </a:p>
+          <a:p>
+            <a:endParaRPr lang="en-US" dirty="0" smtClean="0"/>
+          </a:p>
+          <a:p>
+            <a:pPr marL="0" indent="0">
+              <a:buNone/>
+            </a:pPr>
+            <a:r>
+              <a:rPr lang="en-US" dirty="0" smtClean="0"/>
+              <a:t>Elevation = germination convergent, plant divergent (Mediterranean)</a:t>
+            </a:r>
+          </a:p>
+          <a:p>
+            <a:pPr marL="0" indent="0">
+              <a:buNone/>
+            </a:pPr>
+            <a:endParaRPr lang="en-US" dirty="0" smtClean="0"/>
+          </a:p>
+          <a:p>
+            <a:pPr marL="0" indent="0">
+              <a:buNone/>
+            </a:pPr>
+            <a:r>
+              <a:rPr lang="en-US" dirty="0" smtClean="0"/>
+              <a:t>GDD = germination convergent, plant divergent (Temperate)</a:t>
+            </a:r>
+          </a:p>
+          <a:p>
+            <a:pPr marL="0" indent="0">
+              <a:buNone/>
+            </a:pPr>
+            <a:endParaRPr lang="en-US" dirty="0" smtClean="0"/>
+          </a:p>
+        </p:txBody>
+      </p:sp>
+    </p:spTree>
+    <p:extLst>
+      <p:ext uri="{BB962C8B-B14F-4D97-AF65-F5344CB8AC3E}">
+        <p14:creationId xmlns:p14="http://schemas.microsoft.com/office/powerpoint/2010/main" val="3271350049"/>
+      </p:ext>
+    </p:extLst>
+  </p:cSld>
+  <p:clrMapOvr>
+    <a:masterClrMapping/>
+  </p:clrMapOvr>
+</p:sld>
+</file>
+
+<file path=ppt/slides/slide22.xml><?xml version="1.0" encoding="utf-8"?>
+<p:sld xmlns:a="http://schemas.openxmlformats.org/drawingml/2006/main" xmlns:r="http://schemas.openxmlformats.org/officeDocument/2006/relationships" xmlns:p="http://schemas.openxmlformats.org/presentationml/2006/main">
+  <p:cSld>
+    <p:spTree>
+      <p:nvGrpSpPr>
+        <p:cNvPr id="1" name=""/>
+        <p:cNvGrpSpPr/>
+        <p:nvPr/>
+      </p:nvGrpSpPr>
+      <p:grpSpPr>
+        <a:xfrm>
+          <a:off x="0" y="0"/>
+          <a:ext cx="0" cy="0"/>
+          <a:chOff x="0" y="0"/>
+          <a:chExt cx="0" cy="0"/>
+        </a:xfrm>
+      </p:grpSpPr>
+      <p:pic>
+        <p:nvPicPr>
+          <p:cNvPr id="4" name="Marcador de contenido 3"/>
+          <p:cNvPicPr>
+            <a:picLocks noGrp="1" noChangeAspect="1"/>
+          </p:cNvPicPr>
+          <p:nvPr>
+            <p:ph idx="1"/>
+          </p:nvPr>
+        </p:nvPicPr>
+        <p:blipFill>
+          <a:blip r:embed="rId2"/>
+          <a:stretch>
+            <a:fillRect/>
+          </a:stretch>
+        </p:blipFill>
+        <p:spPr>
+          <a:xfrm>
+            <a:off x="605307" y="0"/>
+            <a:ext cx="4803820" cy="6644512"/>
+          </a:xfrm>
+          <a:prstGeom prst="rect">
+            <a:avLst/>
+          </a:prstGeom>
+        </p:spPr>
+      </p:pic>
+      <p:pic>
+        <p:nvPicPr>
+          <p:cNvPr id="6" name="Imagen 5"/>
+          <p:cNvPicPr>
+            <a:picLocks noChangeAspect="1"/>
+          </p:cNvPicPr>
+          <p:nvPr/>
+        </p:nvPicPr>
+        <p:blipFill>
+          <a:blip r:embed="rId3"/>
+          <a:stretch>
+            <a:fillRect/>
+          </a:stretch>
+        </p:blipFill>
+        <p:spPr>
+          <a:xfrm>
+            <a:off x="5653826" y="1558344"/>
+            <a:ext cx="6448022" cy="3447112"/>
+          </a:xfrm>
+          <a:prstGeom prst="rect">
+            <a:avLst/>
+          </a:prstGeom>
+        </p:spPr>
+      </p:pic>
+    </p:spTree>
+    <p:extLst>
+      <p:ext uri="{BB962C8B-B14F-4D97-AF65-F5344CB8AC3E}">
+        <p14:creationId xmlns:p14="http://schemas.microsoft.com/office/powerpoint/2010/main" val="2671523313"/>
+      </p:ext>
+    </p:extLst>
+  </p:cSld>
+  <p:clrMapOvr>
+    <a:masterClrMapping/>
+  </p:clrMapOvr>
+  <p:timing>
+    <p:tnLst>
+      <p:par>
+        <p:cTn id="1" dur="indefinite" restart="never" nodeType="tmRoot"/>
+      </p:par>
+    </p:tnLst>
+  </p:timing>
+</p:sld>
+</file>
+
+<file path=ppt/slides/slide23.xml><?xml version="1.0" encoding="utf-8"?>
+<p:sld xmlns:a="http://schemas.openxmlformats.org/drawingml/2006/main" xmlns:r="http://schemas.openxmlformats.org/officeDocument/2006/relationships" xmlns:p="http://schemas.openxmlformats.org/presentationml/2006/main">
+  <p:cSld>
+    <p:spTree>
+      <p:nvGrpSpPr>
+        <p:cNvPr id="1" name=""/>
+        <p:cNvGrpSpPr/>
+        <p:nvPr/>
+      </p:nvGrpSpPr>
+      <p:grpSpPr>
+        <a:xfrm>
+          <a:off x="0" y="0"/>
+          <a:ext cx="0" cy="0"/>
+          <a:chOff x="0" y="0"/>
+          <a:chExt cx="0" cy="0"/>
+        </a:xfrm>
+      </p:grpSpPr>
+      <p:pic>
+        <p:nvPicPr>
+          <p:cNvPr id="4" name="Marcador de contenido 3"/>
+          <p:cNvPicPr>
+            <a:picLocks noGrp="1" noChangeAspect="1"/>
+          </p:cNvPicPr>
+          <p:nvPr>
+            <p:ph idx="1"/>
+          </p:nvPr>
+        </p:nvPicPr>
+        <p:blipFill>
+          <a:blip r:embed="rId2"/>
+          <a:stretch>
+            <a:fillRect/>
+          </a:stretch>
+        </p:blipFill>
+        <p:spPr>
+          <a:xfrm>
+            <a:off x="538603" y="578186"/>
+            <a:ext cx="10472833" cy="5598777"/>
+          </a:xfrm>
+          <a:prstGeom prst="rect">
+            <a:avLst/>
+          </a:prstGeom>
+        </p:spPr>
+      </p:pic>
+    </p:spTree>
+    <p:extLst>
+      <p:ext uri="{BB962C8B-B14F-4D97-AF65-F5344CB8AC3E}">
+        <p14:creationId xmlns:p14="http://schemas.microsoft.com/office/powerpoint/2010/main" val="1206931728"/>
+      </p:ext>
+    </p:extLst>
+  </p:cSld>
+  <p:clrMapOvr>
+    <a:masterClrMapping/>
+  </p:clrMapOvr>
+  <p:timing>
+    <p:tnLst>
+      <p:par>
+        <p:cTn id="1" dur="indefinite" restart="never" nodeType="tmRoot"/>
+      </p:par>
+    </p:tnLst>
+  </p:timing>
+</p:sld>
+</file>
+
+<file path=ppt/slides/slide24.xml><?xml version="1.0" encoding="utf-8"?>
+<p:sld xmlns:a="http://schemas.openxmlformats.org/drawingml/2006/main" xmlns:r="http://schemas.openxmlformats.org/officeDocument/2006/relationships" xmlns:p="http://schemas.openxmlformats.org/presentationml/2006/main">
+  <p:cSld>
+    <p:spTree>
+      <p:nvGrpSpPr>
+        <p:cNvPr id="1" name=""/>
+        <p:cNvGrpSpPr/>
+        <p:nvPr/>
+      </p:nvGrpSpPr>
+      <p:grpSpPr>
+        <a:xfrm>
+          <a:off x="0" y="0"/>
+          <a:ext cx="0" cy="0"/>
+          <a:chOff x="0" y="0"/>
+          <a:chExt cx="0" cy="0"/>
+        </a:xfrm>
+      </p:grpSpPr>
+      <p:sp>
+        <p:nvSpPr>
+          <p:cNvPr id="2" name="Título 1"/>
+          <p:cNvSpPr>
+            <a:spLocks noGrp="1"/>
+          </p:cNvSpPr>
+          <p:nvPr>
+            <p:ph type="title"/>
+          </p:nvPr>
+        </p:nvSpPr>
+        <p:spPr/>
+        <p:txBody>
+          <a:bodyPr/>
+          <a:lstStyle/>
+          <a:p>
+            <a:endParaRPr lang="en-US"/>
+          </a:p>
+        </p:txBody>
+      </p:sp>
+      <p:sp>
+        <p:nvSpPr>
+          <p:cNvPr id="3" name="Marcador de contenido 2"/>
+          <p:cNvSpPr>
+            <a:spLocks noGrp="1"/>
+          </p:cNvSpPr>
+          <p:nvPr>
+            <p:ph idx="1"/>
+          </p:nvPr>
+        </p:nvSpPr>
+        <p:spPr/>
+        <p:txBody>
+          <a:bodyPr/>
+          <a:lstStyle/>
+          <a:p>
+            <a:endParaRPr lang="en-US"/>
+          </a:p>
+        </p:txBody>
+      </p:sp>
+    </p:spTree>
+    <p:extLst>
+      <p:ext uri="{BB962C8B-B14F-4D97-AF65-F5344CB8AC3E}">
+        <p14:creationId xmlns:p14="http://schemas.microsoft.com/office/powerpoint/2010/main" val="2931728224"/>
+      </p:ext>
+    </p:extLst>
+  </p:cSld>
+  <p:clrMapOvr>
+    <a:masterClrMapping/>
+  </p:clrMapOvr>
+</p:sld>
+</file>
+
+<file path=ppt/slides/slide3.xml><?xml version="1.0" encoding="utf-8"?>
+<p:sld xmlns:a="http://schemas.openxmlformats.org/drawingml/2006/main" xmlns:r="http://schemas.openxmlformats.org/officeDocument/2006/relationships" xmlns:p="http://schemas.openxmlformats.org/presentationml/2006/main">
+  <p:cSld>
+    <p:spTree>
+      <p:nvGrpSpPr>
+        <p:cNvPr id="1" name=""/>
+        <p:cNvGrpSpPr/>
+        <p:nvPr/>
+      </p:nvGrpSpPr>
+      <p:grpSpPr>
+        <a:xfrm>
+          <a:off x="0" y="0"/>
+          <a:ext cx="0" cy="0"/>
+          <a:chOff x="0" y="0"/>
+          <a:chExt cx="0" cy="0"/>
+        </a:xfrm>
+      </p:grpSpPr>
+      <p:sp>
+        <p:nvSpPr>
+          <p:cNvPr id="2" name="Título 1"/>
+          <p:cNvSpPr>
+            <a:spLocks noGrp="1"/>
+          </p:cNvSpPr>
+          <p:nvPr>
+            <p:ph type="title"/>
+          </p:nvPr>
+        </p:nvSpPr>
+        <p:spPr/>
+        <p:txBody>
+          <a:bodyPr/>
+          <a:lstStyle/>
+          <a:p>
+            <a:r>
+              <a:rPr lang="en-US" dirty="0" smtClean="0"/>
+              <a:t>Main introductory points</a:t>
+            </a:r>
+            <a:endParaRPr lang="en-US" dirty="0"/>
+          </a:p>
+        </p:txBody>
+      </p:sp>
+      <p:sp>
+        <p:nvSpPr>
+          <p:cNvPr id="3" name="Marcador de contenido 2"/>
+          <p:cNvSpPr>
+            <a:spLocks noGrp="1"/>
+          </p:cNvSpPr>
+          <p:nvPr>
+            <p:ph idx="1"/>
+          </p:nvPr>
+        </p:nvSpPr>
+        <p:spPr>
+          <a:xfrm>
+            <a:off x="838200" y="1559408"/>
+            <a:ext cx="10515600" cy="4351338"/>
+          </a:xfrm>
+        </p:spPr>
+        <p:txBody>
+          <a:bodyPr>
+            <a:normAutofit lnSpcReduction="10000"/>
+          </a:bodyPr>
+          <a:lstStyle/>
+          <a:p>
+            <a:r>
+              <a:rPr lang="en-US" dirty="0" smtClean="0"/>
+              <a:t>Grubb’s theory says that:</a:t>
+            </a:r>
+          </a:p>
+          <a:p>
+            <a:pPr marL="0" indent="0">
+              <a:buNone/>
+            </a:pPr>
+            <a:endParaRPr lang="en-US" dirty="0" smtClean="0"/>
+          </a:p>
+          <a:p>
+            <a:pPr marL="0" indent="0">
+              <a:buNone/>
+            </a:pPr>
+            <a:r>
+              <a:rPr lang="en-US" dirty="0" smtClean="0"/>
+              <a:t>Regeneration niche differentiation </a:t>
+            </a:r>
+            <a:r>
+              <a:rPr lang="en-US" dirty="0" smtClean="0">
+                <a:solidFill>
+                  <a:srgbClr val="FF0000"/>
+                </a:solidFill>
+              </a:rPr>
+              <a:t>&gt;&gt;</a:t>
+            </a:r>
+            <a:r>
+              <a:rPr lang="en-US" dirty="0" smtClean="0"/>
+              <a:t> Adult plant niche differentiation</a:t>
+            </a:r>
+          </a:p>
+          <a:p>
+            <a:pPr marL="0" indent="0">
+              <a:buNone/>
+            </a:pPr>
+            <a:endParaRPr lang="en-US" dirty="0" smtClean="0"/>
+          </a:p>
+          <a:p>
+            <a:r>
+              <a:rPr lang="en-US" dirty="0" smtClean="0"/>
+              <a:t>Plenty literature about diversity in regeneration trait but NO empirically based comparison between both sets of traits</a:t>
+            </a:r>
+          </a:p>
+          <a:p>
+            <a:pPr marL="0" indent="0">
+              <a:buNone/>
+            </a:pPr>
+            <a:endParaRPr lang="en-US" dirty="0" smtClean="0"/>
+          </a:p>
+          <a:p>
+            <a:r>
+              <a:rPr lang="en-US" dirty="0" smtClean="0"/>
+              <a:t>Additionally, microclimatic conditions are known to be very important in alpine compositional and functional diversity of adult plants (existing literature) as well as for germination (almost no literature)</a:t>
+            </a:r>
+          </a:p>
+          <a:p>
+            <a:pPr marL="0" indent="0">
+              <a:buNone/>
+            </a:pPr>
+            <a:endParaRPr lang="en-US" dirty="0"/>
+          </a:p>
+        </p:txBody>
+      </p:sp>
+    </p:spTree>
+    <p:extLst>
+      <p:ext uri="{BB962C8B-B14F-4D97-AF65-F5344CB8AC3E}">
+        <p14:creationId xmlns:p14="http://schemas.microsoft.com/office/powerpoint/2010/main" val="2657494604"/>
+      </p:ext>
+    </p:extLst>
+  </p:cSld>
+  <p:clrMapOvr>
+    <a:masterClrMapping/>
+  </p:clrMapOvr>
+</p:sld>
+</file>
+
+<file path=ppt/slides/slide4.xml><?xml version="1.0" encoding="utf-8"?>
+<p:sld xmlns:a="http://schemas.openxmlformats.org/drawingml/2006/main" xmlns:r="http://schemas.openxmlformats.org/officeDocument/2006/relationships" xmlns:p="http://schemas.openxmlformats.org/presentationml/2006/main">
+  <p:cSld>
+    <p:spTree>
+      <p:nvGrpSpPr>
+        <p:cNvPr id="1" name=""/>
+        <p:cNvGrpSpPr/>
+        <p:nvPr/>
+      </p:nvGrpSpPr>
+      <p:grpSpPr>
+        <a:xfrm>
+          <a:off x="0" y="0"/>
+          <a:ext cx="0" cy="0"/>
+          <a:chOff x="0" y="0"/>
+          <a:chExt cx="0" cy="0"/>
+        </a:xfrm>
+      </p:grpSpPr>
+      <p:sp>
+        <p:nvSpPr>
+          <p:cNvPr id="2" name="Título 1"/>
+          <p:cNvSpPr>
+            <a:spLocks noGrp="1"/>
+          </p:cNvSpPr>
+          <p:nvPr>
+            <p:ph type="title"/>
+          </p:nvPr>
+        </p:nvSpPr>
+        <p:spPr/>
+        <p:txBody>
+          <a:bodyPr/>
+          <a:lstStyle/>
+          <a:p>
+            <a:r>
+              <a:rPr lang="en-US" dirty="0" smtClean="0"/>
+              <a:t>Main goal</a:t>
+            </a:r>
+            <a:endParaRPr lang="en-US" dirty="0"/>
+          </a:p>
+        </p:txBody>
+      </p:sp>
+      <p:sp>
+        <p:nvSpPr>
+          <p:cNvPr id="3" name="Marcador de contenido 2"/>
+          <p:cNvSpPr>
+            <a:spLocks noGrp="1"/>
+          </p:cNvSpPr>
+          <p:nvPr>
+            <p:ph idx="1"/>
+          </p:nvPr>
+        </p:nvSpPr>
+        <p:spPr>
+          <a:xfrm>
+            <a:off x="791902" y="1690688"/>
+            <a:ext cx="10515600" cy="4351338"/>
+          </a:xfrm>
+        </p:spPr>
+        <p:txBody>
+          <a:bodyPr>
+            <a:normAutofit/>
+          </a:bodyPr>
+          <a:lstStyle/>
+          <a:p>
+            <a:r>
+              <a:rPr lang="en-US" dirty="0" smtClean="0"/>
+              <a:t>Study germination niche dissimilarity pattern:</a:t>
+            </a:r>
+          </a:p>
+          <a:p>
+            <a:pPr lvl="1"/>
+            <a:r>
+              <a:rPr lang="en-US" dirty="0" smtClean="0"/>
+              <a:t>With community level metrics (CM/CWM and Functional divergence indices).</a:t>
+            </a:r>
+          </a:p>
+          <a:p>
+            <a:pPr lvl="1"/>
+            <a:r>
+              <a:rPr lang="en-US" dirty="0" smtClean="0"/>
+              <a:t>Empirical data for germination (3 traits) and adult plant traits (5 traits).</a:t>
+            </a:r>
+          </a:p>
+          <a:p>
+            <a:pPr lvl="1"/>
+            <a:r>
+              <a:rPr lang="en-US" dirty="0" smtClean="0"/>
+              <a:t>Detailed field measured microclimatic gradients in two communities.</a:t>
+            </a:r>
+            <a:endParaRPr lang="en-US" dirty="0"/>
+          </a:p>
+          <a:p>
+            <a:endParaRPr lang="en-US" dirty="0" smtClean="0"/>
+          </a:p>
+          <a:p>
+            <a:r>
+              <a:rPr lang="en-US" dirty="0" smtClean="0"/>
+              <a:t>To our knowledge no one has tested it empirically</a:t>
+            </a:r>
+          </a:p>
+        </p:txBody>
+      </p:sp>
+    </p:spTree>
+    <p:extLst>
+      <p:ext uri="{BB962C8B-B14F-4D97-AF65-F5344CB8AC3E}">
+        <p14:creationId xmlns:p14="http://schemas.microsoft.com/office/powerpoint/2010/main" val="78482830"/>
+      </p:ext>
+    </p:extLst>
+  </p:cSld>
+  <p:clrMapOvr>
+    <a:masterClrMapping/>
+  </p:clrMapOvr>
+</p:sld>
+</file>
+
+<file path=ppt/slides/slide5.xml><?xml version="1.0" encoding="utf-8"?>
+<p:sld xmlns:a="http://schemas.openxmlformats.org/drawingml/2006/main" xmlns:r="http://schemas.openxmlformats.org/officeDocument/2006/relationships" xmlns:p="http://schemas.openxmlformats.org/presentationml/2006/main">
+  <p:cSld>
+    <p:spTree>
+      <p:nvGrpSpPr>
+        <p:cNvPr id="1" name=""/>
+        <p:cNvGrpSpPr/>
+        <p:nvPr/>
+      </p:nvGrpSpPr>
+      <p:grpSpPr>
+        <a:xfrm>
+          <a:off x="0" y="0"/>
+          <a:ext cx="0" cy="0"/>
+          <a:chOff x="0" y="0"/>
+          <a:chExt cx="0" cy="0"/>
+        </a:xfrm>
+      </p:grpSpPr>
+      <p:sp>
+        <p:nvSpPr>
+          <p:cNvPr id="2" name="Título 1"/>
+          <p:cNvSpPr>
+            <a:spLocks noGrp="1"/>
+          </p:cNvSpPr>
+          <p:nvPr>
+            <p:ph type="title"/>
+          </p:nvPr>
+        </p:nvSpPr>
+        <p:spPr/>
+        <p:txBody>
+          <a:bodyPr/>
+          <a:lstStyle/>
+          <a:p>
+            <a:r>
+              <a:rPr lang="en-US" dirty="0" smtClean="0"/>
+              <a:t>Objectives</a:t>
+            </a:r>
+            <a:endParaRPr lang="en-US" dirty="0"/>
+          </a:p>
+        </p:txBody>
+      </p:sp>
+      <p:sp>
+        <p:nvSpPr>
+          <p:cNvPr id="3" name="Marcador de contenido 2"/>
+          <p:cNvSpPr>
+            <a:spLocks noGrp="1"/>
+          </p:cNvSpPr>
+          <p:nvPr>
+            <p:ph idx="1"/>
+          </p:nvPr>
+        </p:nvSpPr>
+        <p:spPr/>
+        <p:txBody>
+          <a:bodyPr>
+            <a:normAutofit lnSpcReduction="10000"/>
+          </a:bodyPr>
+          <a:lstStyle/>
+          <a:p>
+            <a:pPr marL="514350" indent="-514350">
+              <a:buFont typeface="+mj-lt"/>
+              <a:buAutoNum type="arabicPeriod"/>
+            </a:pPr>
+            <a:r>
+              <a:rPr lang="en-US" dirty="0" smtClean="0"/>
+              <a:t>Determine germination patterns to main drivers in alpine communities</a:t>
+            </a:r>
+          </a:p>
+          <a:p>
+            <a:pPr marL="514350" indent="-514350">
+              <a:buFont typeface="+mj-lt"/>
+              <a:buAutoNum type="arabicPeriod"/>
+            </a:pPr>
+            <a:r>
+              <a:rPr lang="en-US" dirty="0" smtClean="0"/>
+              <a:t>Explore relationships between CM/CWM and microclimatic gradients</a:t>
+            </a:r>
+          </a:p>
+          <a:p>
+            <a:pPr marL="514350" indent="-514350">
+              <a:buFont typeface="+mj-lt"/>
+              <a:buAutoNum type="arabicPeriod"/>
+            </a:pPr>
+            <a:r>
+              <a:rPr lang="en-US" dirty="0" smtClean="0"/>
+              <a:t>Explore functional divergence (FD) in alpine communities</a:t>
+            </a:r>
+          </a:p>
+          <a:p>
+            <a:pPr marL="457200" lvl="1" indent="0">
+              <a:buNone/>
+            </a:pPr>
+            <a:r>
+              <a:rPr lang="en-US" dirty="0" smtClean="0"/>
+              <a:t>3.1. Compare germination and adult plant niche dissimilarities</a:t>
+            </a:r>
+          </a:p>
+          <a:p>
+            <a:pPr marL="457200" lvl="1" indent="0">
+              <a:buNone/>
+            </a:pPr>
+            <a:r>
+              <a:rPr lang="en-US" dirty="0" smtClean="0"/>
+              <a:t>3.2. Relationships between FD and microclimatic gradients</a:t>
+            </a:r>
+            <a:endParaRPr lang="en-US" dirty="0"/>
+          </a:p>
+          <a:p>
+            <a:pPr marL="457200" lvl="1" indent="0">
+              <a:buNone/>
+            </a:pPr>
+            <a:endParaRPr lang="en-US" dirty="0" smtClean="0"/>
+          </a:p>
+          <a:p>
+            <a:pPr marL="457200" lvl="1" indent="0">
+              <a:buNone/>
+            </a:pPr>
+            <a:endParaRPr lang="en-US" dirty="0"/>
+          </a:p>
+          <a:p>
+            <a:pPr marL="457200" lvl="1" indent="0">
+              <a:buNone/>
+            </a:pPr>
+            <a:r>
+              <a:rPr lang="en-US" dirty="0" smtClean="0">
+                <a:solidFill>
+                  <a:srgbClr val="FF0000"/>
+                </a:solidFill>
+              </a:rPr>
+              <a:t>Need of clear hypothesis to understand results and be able to compare it with literature.</a:t>
+            </a:r>
+          </a:p>
+        </p:txBody>
+      </p:sp>
+    </p:spTree>
+    <p:extLst>
+      <p:ext uri="{BB962C8B-B14F-4D97-AF65-F5344CB8AC3E}">
+        <p14:creationId xmlns:p14="http://schemas.microsoft.com/office/powerpoint/2010/main" val="97574445"/>
+      </p:ext>
+    </p:extLst>
+  </p:cSld>
+  <p:clrMapOvr>
+    <a:masterClrMapping/>
+  </p:clrMapOvr>
+</p:sld>
+</file>
+
+<file path=ppt/slides/slide6.xml><?xml version="1.0" encoding="utf-8"?>
+<p:sld xmlns:a="http://schemas.openxmlformats.org/drawingml/2006/main" xmlns:r="http://schemas.openxmlformats.org/officeDocument/2006/relationships" xmlns:p="http://schemas.openxmlformats.org/presentationml/2006/main">
+  <p:cSld>
+    <p:spTree>
+      <p:nvGrpSpPr>
+        <p:cNvPr id="1" name=""/>
+        <p:cNvGrpSpPr/>
+        <p:nvPr/>
+      </p:nvGrpSpPr>
+      <p:grpSpPr>
+        <a:xfrm>
+          <a:off x="0" y="0"/>
+          <a:ext cx="0" cy="0"/>
+          <a:chOff x="0" y="0"/>
+          <a:chExt cx="0" cy="0"/>
+        </a:xfrm>
+      </p:grpSpPr>
+      <p:sp>
+        <p:nvSpPr>
+          <p:cNvPr id="2" name="Título 1"/>
+          <p:cNvSpPr>
+            <a:spLocks noGrp="1"/>
+          </p:cNvSpPr>
+          <p:nvPr>
+            <p:ph type="title"/>
+          </p:nvPr>
+        </p:nvSpPr>
+        <p:spPr/>
+        <p:txBody>
+          <a:bodyPr/>
+          <a:lstStyle/>
+          <a:p>
+            <a:r>
+              <a:rPr lang="en-US" dirty="0" smtClean="0"/>
+              <a:t>Data availability</a:t>
+            </a:r>
+            <a:endParaRPr lang="en-US" dirty="0"/>
+          </a:p>
+        </p:txBody>
+      </p:sp>
+      <p:sp>
+        <p:nvSpPr>
+          <p:cNvPr id="3" name="Marcador de contenido 2"/>
+          <p:cNvSpPr>
+            <a:spLocks noGrp="1"/>
+          </p:cNvSpPr>
+          <p:nvPr>
+            <p:ph idx="1"/>
+          </p:nvPr>
+        </p:nvSpPr>
+        <p:spPr/>
+        <p:txBody>
+          <a:bodyPr>
+            <a:normAutofit lnSpcReduction="10000"/>
+          </a:bodyPr>
+          <a:lstStyle/>
+          <a:p>
+            <a:r>
+              <a:rPr lang="en-US" dirty="0" smtClean="0"/>
+              <a:t>8 functional traits:</a:t>
+            </a:r>
+          </a:p>
+          <a:p>
+            <a:pPr lvl="1"/>
+            <a:r>
+              <a:rPr lang="en-US" dirty="0" smtClean="0"/>
+              <a:t>3 germination responses to darkness, water stress and constant temperatures</a:t>
+            </a:r>
+          </a:p>
+          <a:p>
+            <a:pPr lvl="1"/>
+            <a:r>
+              <a:rPr lang="en-US" dirty="0" smtClean="0"/>
+              <a:t>5 adult traits extensively used:</a:t>
+            </a:r>
+          </a:p>
+          <a:p>
+            <a:pPr lvl="2"/>
+            <a:r>
+              <a:rPr lang="en-US" dirty="0" smtClean="0"/>
+              <a:t>Leaf area, plant height and seed mass (LHS scheme)</a:t>
+            </a:r>
+          </a:p>
+          <a:p>
+            <a:pPr lvl="2"/>
+            <a:r>
+              <a:rPr lang="en-US" dirty="0" smtClean="0"/>
+              <a:t>SLA and LDMC</a:t>
+            </a:r>
+          </a:p>
+          <a:p>
+            <a:endParaRPr lang="en-US" dirty="0" smtClean="0"/>
+          </a:p>
+          <a:p>
+            <a:r>
+              <a:rPr lang="en-US" dirty="0" smtClean="0"/>
+              <a:t>Species with full set of traits:</a:t>
+            </a:r>
+          </a:p>
+          <a:p>
+            <a:pPr lvl="1"/>
+            <a:r>
+              <a:rPr lang="en-US" dirty="0" smtClean="0"/>
+              <a:t>18 </a:t>
+            </a:r>
+            <a:r>
+              <a:rPr lang="en-US" dirty="0" smtClean="0"/>
+              <a:t>species in Mediterranean </a:t>
+            </a:r>
+            <a:r>
+              <a:rPr lang="en-US" dirty="0" smtClean="0"/>
+              <a:t>community (5 </a:t>
+            </a:r>
+            <a:r>
+              <a:rPr lang="en-US" dirty="0" err="1" smtClean="0"/>
+              <a:t>sp</a:t>
+            </a:r>
+            <a:r>
+              <a:rPr lang="en-US" dirty="0" smtClean="0"/>
+              <a:t> with no germination, 1 with no leaves traits)</a:t>
+            </a:r>
+            <a:endParaRPr lang="en-US" dirty="0" smtClean="0"/>
+          </a:p>
+          <a:p>
+            <a:pPr lvl="1"/>
+            <a:r>
+              <a:rPr lang="en-US" dirty="0" smtClean="0"/>
+              <a:t>25 </a:t>
+            </a:r>
+            <a:r>
+              <a:rPr lang="en-US" dirty="0" smtClean="0"/>
+              <a:t>species in Temperate </a:t>
+            </a:r>
+            <a:r>
+              <a:rPr lang="en-US" dirty="0" smtClean="0"/>
+              <a:t>community (7 </a:t>
+            </a:r>
+            <a:r>
+              <a:rPr lang="en-US" dirty="0" err="1" smtClean="0"/>
+              <a:t>sp</a:t>
+            </a:r>
+            <a:r>
+              <a:rPr lang="en-US" dirty="0" smtClean="0"/>
+              <a:t> with no germination, 2 with no leaves traits)</a:t>
+            </a:r>
+            <a:endParaRPr lang="en-US" dirty="0" smtClean="0"/>
+          </a:p>
+        </p:txBody>
+      </p:sp>
+    </p:spTree>
+    <p:extLst>
+      <p:ext uri="{BB962C8B-B14F-4D97-AF65-F5344CB8AC3E}">
+        <p14:creationId xmlns:p14="http://schemas.microsoft.com/office/powerpoint/2010/main" val="1492372542"/>
+      </p:ext>
+    </p:extLst>
+  </p:cSld>
+  <p:clrMapOvr>
+    <a:masterClrMapping/>
+  </p:clrMapOvr>
+</p:sld>
+</file>
+
+<file path=ppt/slides/slide7.xml><?xml version="1.0" encoding="utf-8"?>
+<p:sld xmlns:a="http://schemas.openxmlformats.org/drawingml/2006/main" xmlns:r="http://schemas.openxmlformats.org/officeDocument/2006/relationships" xmlns:p="http://schemas.openxmlformats.org/presentationml/2006/main">
+  <p:cSld>
+    <p:spTree>
+      <p:nvGrpSpPr>
+        <p:cNvPr id="1" name=""/>
+        <p:cNvGrpSpPr/>
+        <p:nvPr/>
+      </p:nvGrpSpPr>
+      <p:grpSpPr>
+        <a:xfrm>
+          <a:off x="0" y="0"/>
+          <a:ext cx="0" cy="0"/>
+          <a:chOff x="0" y="0"/>
+          <a:chExt cx="0" cy="0"/>
+        </a:xfrm>
+      </p:grpSpPr>
+      <p:sp>
+        <p:nvSpPr>
+          <p:cNvPr id="5" name="Marcador de contenido 2"/>
           <p:cNvSpPr txBox="1">
             <a:spLocks/>
           </p:cNvSpPr>
@@ -3424,2296 +5847,37 @@
             </a:lvl9pPr>
           </a:lstStyle>
           <a:p>
-            <a:pPr marL="0" indent="0">
-              <a:buNone/>
-            </a:pPr>
-            <a:r>
-              <a:rPr lang="en-US" dirty="0" smtClean="0"/>
-              <a:t>	MEDITERRANEAN			            	TEMPERATE</a:t>
-            </a:r>
-          </a:p>
-        </p:txBody>
-      </p:sp>
-    </p:spTree>
-    <p:extLst>
-      <p:ext uri="{BB962C8B-B14F-4D97-AF65-F5344CB8AC3E}">
-        <p14:creationId xmlns:p14="http://schemas.microsoft.com/office/powerpoint/2010/main" val="2989904990"/>
-      </p:ext>
-    </p:extLst>
-  </p:cSld>
-  <p:clrMapOvr>
-    <a:masterClrMapping/>
-  </p:clrMapOvr>
-</p:sld>
-</file>
-
-<file path=ppt/slides/slide11.xml><?xml version="1.0" encoding="utf-8"?>
-<p:sld xmlns:a="http://schemas.openxmlformats.org/drawingml/2006/main" xmlns:r="http://schemas.openxmlformats.org/officeDocument/2006/relationships" xmlns:p="http://schemas.openxmlformats.org/presentationml/2006/main">
-  <p:cSld>
-    <p:spTree>
-      <p:nvGrpSpPr>
-        <p:cNvPr id="1" name=""/>
-        <p:cNvGrpSpPr/>
-        <p:nvPr/>
-      </p:nvGrpSpPr>
-      <p:grpSpPr>
-        <a:xfrm>
-          <a:off x="0" y="0"/>
-          <a:ext cx="0" cy="0"/>
-          <a:chOff x="0" y="0"/>
-          <a:chExt cx="0" cy="0"/>
-        </a:xfrm>
-      </p:grpSpPr>
-      <p:pic>
-        <p:nvPicPr>
-          <p:cNvPr id="5" name="Marcador de contenido 4"/>
-          <p:cNvPicPr>
-            <a:picLocks noGrp="1" noChangeAspect="1"/>
-          </p:cNvPicPr>
-          <p:nvPr>
-            <p:ph idx="1"/>
-          </p:nvPr>
-        </p:nvPicPr>
-        <p:blipFill>
-          <a:blip r:embed="rId2">
-            <a:extLst>
-              <a:ext uri="{28A0092B-C50C-407E-A947-70E740481C1C}">
-                <a14:useLocalDpi xmlns:a14="http://schemas.microsoft.com/office/drawing/2010/main" val="0"/>
-              </a:ext>
-            </a:extLst>
-          </a:blip>
-          <a:stretch>
-            <a:fillRect/>
-          </a:stretch>
-        </p:blipFill>
-        <p:spPr>
-          <a:xfrm>
-            <a:off x="838200" y="1344906"/>
-            <a:ext cx="4983866" cy="4751034"/>
-          </a:xfrm>
-        </p:spPr>
-      </p:pic>
-      <p:sp>
-        <p:nvSpPr>
-          <p:cNvPr id="4" name="Título 1"/>
-          <p:cNvSpPr>
-            <a:spLocks noGrp="1"/>
-          </p:cNvSpPr>
-          <p:nvPr>
-            <p:ph type="title"/>
-          </p:nvPr>
-        </p:nvSpPr>
-        <p:spPr/>
-        <p:txBody>
-          <a:bodyPr/>
-          <a:lstStyle/>
-          <a:p>
-            <a:r>
-              <a:rPr lang="en-US" dirty="0" smtClean="0"/>
-              <a:t>Data exploration:</a:t>
-            </a:r>
-            <a:br>
-              <a:rPr lang="en-US" dirty="0" smtClean="0"/>
-            </a:br>
-            <a:r>
-              <a:rPr lang="en-US" dirty="0" smtClean="0"/>
-              <a:t>Traits PCA</a:t>
-            </a:r>
+            <a:r>
+              <a:rPr lang="en-US" dirty="0" smtClean="0"/>
+              <a:t>4 sites per community, 20 plots per site (N real= 75 and 78 )</a:t>
+            </a:r>
+          </a:p>
+          <a:p>
             <a:endParaRPr lang="en-US" dirty="0"/>
           </a:p>
-        </p:txBody>
-      </p:sp>
-      <p:pic>
-        <p:nvPicPr>
-          <p:cNvPr id="6" name="Imagen 5"/>
-          <p:cNvPicPr>
-            <a:picLocks noChangeAspect="1"/>
-          </p:cNvPicPr>
-          <p:nvPr/>
-        </p:nvPicPr>
-        <p:blipFill>
-          <a:blip r:embed="rId3">
-            <a:extLst>
-              <a:ext uri="{28A0092B-C50C-407E-A947-70E740481C1C}">
-                <a14:useLocalDpi xmlns:a14="http://schemas.microsoft.com/office/drawing/2010/main" val="0"/>
-              </a:ext>
-            </a:extLst>
-          </a:blip>
-          <a:stretch>
-            <a:fillRect/>
-          </a:stretch>
-        </p:blipFill>
-        <p:spPr>
-          <a:xfrm>
-            <a:off x="5822066" y="1344905"/>
-            <a:ext cx="4988688" cy="4755631"/>
-          </a:xfrm>
-          <a:prstGeom prst="rect">
-            <a:avLst/>
-          </a:prstGeom>
-        </p:spPr>
-      </p:pic>
-    </p:spTree>
-    <p:extLst>
-      <p:ext uri="{BB962C8B-B14F-4D97-AF65-F5344CB8AC3E}">
-        <p14:creationId xmlns:p14="http://schemas.microsoft.com/office/powerpoint/2010/main" val="547215890"/>
-      </p:ext>
-    </p:extLst>
-  </p:cSld>
-  <p:clrMapOvr>
-    <a:masterClrMapping/>
-  </p:clrMapOvr>
-</p:sld>
-</file>
-
-<file path=ppt/slides/slide12.xml><?xml version="1.0" encoding="utf-8"?>
-<p:sld xmlns:a="http://schemas.openxmlformats.org/drawingml/2006/main" xmlns:r="http://schemas.openxmlformats.org/officeDocument/2006/relationships" xmlns:p="http://schemas.openxmlformats.org/presentationml/2006/main">
-  <p:cSld>
-    <p:spTree>
-      <p:nvGrpSpPr>
-        <p:cNvPr id="1" name=""/>
-        <p:cNvGrpSpPr/>
-        <p:nvPr/>
-      </p:nvGrpSpPr>
-      <p:grpSpPr>
-        <a:xfrm>
-          <a:off x="0" y="0"/>
-          <a:ext cx="0" cy="0"/>
-          <a:chOff x="0" y="0"/>
-          <a:chExt cx="0" cy="0"/>
-        </a:xfrm>
-      </p:grpSpPr>
-      <p:sp>
-        <p:nvSpPr>
-          <p:cNvPr id="2" name="Título 1"/>
-          <p:cNvSpPr>
-            <a:spLocks noGrp="1"/>
-          </p:cNvSpPr>
-          <p:nvPr>
-            <p:ph type="title"/>
-          </p:nvPr>
-        </p:nvSpPr>
-        <p:spPr/>
-        <p:txBody>
-          <a:bodyPr/>
-          <a:lstStyle/>
-          <a:p>
-            <a:r>
-              <a:rPr lang="en-US" dirty="0" smtClean="0"/>
-              <a:t>1. Germination patterns </a:t>
-            </a:r>
-            <a:r>
-              <a:rPr lang="en-US" sz="2400" dirty="0" smtClean="0"/>
-              <a:t>(Remove or keep in supplementary?)</a:t>
-            </a:r>
+          <a:p>
+            <a:endParaRPr lang="en-US" dirty="0" smtClean="0"/>
+          </a:p>
+          <a:p>
+            <a:endParaRPr lang="en-US" dirty="0" smtClean="0"/>
+          </a:p>
+          <a:p>
             <a:endParaRPr lang="en-US" dirty="0"/>
           </a:p>
-        </p:txBody>
-      </p:sp>
-      <p:pic>
-        <p:nvPicPr>
-          <p:cNvPr id="4" name="Marcador de contenido 3"/>
-          <p:cNvPicPr>
-            <a:picLocks noGrp="1" noChangeAspect="1"/>
-          </p:cNvPicPr>
-          <p:nvPr>
-            <p:ph idx="1"/>
-          </p:nvPr>
-        </p:nvPicPr>
-        <p:blipFill>
-          <a:blip r:embed="rId2" cstate="print">
-            <a:extLst>
-              <a:ext uri="{28A0092B-C50C-407E-A947-70E740481C1C}">
-                <a14:useLocalDpi xmlns:a14="http://schemas.microsoft.com/office/drawing/2010/main" val="0"/>
-              </a:ext>
-            </a:extLst>
-          </a:blip>
-          <a:stretch>
-            <a:fillRect/>
-          </a:stretch>
-        </p:blipFill>
-        <p:spPr>
-          <a:xfrm>
-            <a:off x="1107818" y="1690688"/>
-            <a:ext cx="7638278" cy="4351338"/>
-          </a:xfrm>
-        </p:spPr>
-      </p:pic>
-      <p:sp>
-        <p:nvSpPr>
-          <p:cNvPr id="5" name="CuadroTexto 4"/>
-          <p:cNvSpPr txBox="1"/>
-          <p:nvPr/>
-        </p:nvSpPr>
-        <p:spPr>
-          <a:xfrm>
-            <a:off x="8848846" y="3455042"/>
-            <a:ext cx="3090441" cy="1477328"/>
-          </a:xfrm>
-          <a:prstGeom prst="rect">
-            <a:avLst/>
-          </a:prstGeom>
-          <a:noFill/>
-          <a:ln w="38100">
-            <a:solidFill>
-              <a:srgbClr val="FF0000"/>
-            </a:solidFill>
-          </a:ln>
-        </p:spPr>
-        <p:txBody>
-          <a:bodyPr wrap="square" rtlCol="0">
-            <a:spAutoFit/>
-          </a:bodyPr>
-          <a:lstStyle/>
-          <a:p>
-            <a:r>
-              <a:rPr lang="en-US" dirty="0" smtClean="0"/>
-              <a:t>MCMC-GLMMs</a:t>
-            </a:r>
-          </a:p>
-          <a:p>
-            <a:endParaRPr lang="en-US" dirty="0" smtClean="0"/>
-          </a:p>
-          <a:p>
-            <a:r>
-              <a:rPr lang="en-US" dirty="0" smtClean="0"/>
-              <a:t>Consistent lower germination in darkness and water stress</a:t>
-            </a:r>
-          </a:p>
-          <a:p>
-            <a:endParaRPr lang="en-US" dirty="0"/>
-          </a:p>
-        </p:txBody>
-      </p:sp>
-    </p:spTree>
-    <p:extLst>
-      <p:ext uri="{BB962C8B-B14F-4D97-AF65-F5344CB8AC3E}">
-        <p14:creationId xmlns:p14="http://schemas.microsoft.com/office/powerpoint/2010/main" val="2718894467"/>
-      </p:ext>
-    </p:extLst>
-  </p:cSld>
-  <p:clrMapOvr>
-    <a:masterClrMapping/>
-  </p:clrMapOvr>
-</p:sld>
-</file>
-
-<file path=ppt/slides/slide13.xml><?xml version="1.0" encoding="utf-8"?>
-<p:sld xmlns:a="http://schemas.openxmlformats.org/drawingml/2006/main" xmlns:r="http://schemas.openxmlformats.org/officeDocument/2006/relationships" xmlns:p="http://schemas.openxmlformats.org/presentationml/2006/main">
-  <p:cSld>
-    <p:spTree>
-      <p:nvGrpSpPr>
-        <p:cNvPr id="1" name=""/>
-        <p:cNvGrpSpPr/>
-        <p:nvPr/>
-      </p:nvGrpSpPr>
-      <p:grpSpPr>
-        <a:xfrm>
-          <a:off x="0" y="0"/>
-          <a:ext cx="0" cy="0"/>
-          <a:chOff x="0" y="0"/>
-          <a:chExt cx="0" cy="0"/>
-        </a:xfrm>
-      </p:grpSpPr>
-      <p:sp>
-        <p:nvSpPr>
-          <p:cNvPr id="2" name="Título 1"/>
-          <p:cNvSpPr>
-            <a:spLocks noGrp="1"/>
-          </p:cNvSpPr>
-          <p:nvPr>
-            <p:ph type="title"/>
-          </p:nvPr>
-        </p:nvSpPr>
-        <p:spPr/>
-        <p:txBody>
-          <a:bodyPr>
-            <a:normAutofit/>
-          </a:bodyPr>
-          <a:lstStyle/>
-          <a:p>
-            <a:r>
-              <a:rPr lang="en-US" sz="3600" dirty="0" smtClean="0"/>
-              <a:t>2. Community metrics along microclimatic gradients</a:t>
-            </a:r>
-            <a:endParaRPr lang="en-US" sz="3600" dirty="0"/>
-          </a:p>
-        </p:txBody>
-      </p:sp>
-      <p:pic>
-        <p:nvPicPr>
-          <p:cNvPr id="4" name="Marcador de contenido 3"/>
-          <p:cNvPicPr>
-            <a:picLocks noGrp="1" noChangeAspect="1"/>
-          </p:cNvPicPr>
-          <p:nvPr>
-            <p:ph idx="1"/>
-          </p:nvPr>
-        </p:nvPicPr>
-        <p:blipFill>
-          <a:blip r:embed="rId2" cstate="print">
-            <a:extLst>
-              <a:ext uri="{28A0092B-C50C-407E-A947-70E740481C1C}">
-                <a14:useLocalDpi xmlns:a14="http://schemas.microsoft.com/office/drawing/2010/main" val="0"/>
-              </a:ext>
-            </a:extLst>
-          </a:blip>
-          <a:stretch>
-            <a:fillRect/>
-          </a:stretch>
-        </p:blipFill>
-        <p:spPr>
-          <a:xfrm>
-            <a:off x="106711" y="1411104"/>
-            <a:ext cx="9087821" cy="4812158"/>
-          </a:xfrm>
-        </p:spPr>
-      </p:pic>
-      <p:sp>
-        <p:nvSpPr>
-          <p:cNvPr id="5" name="CuadroTexto 4"/>
-          <p:cNvSpPr txBox="1"/>
-          <p:nvPr/>
-        </p:nvSpPr>
-        <p:spPr>
-          <a:xfrm>
-            <a:off x="9377412" y="1970523"/>
-            <a:ext cx="2551083" cy="3693319"/>
-          </a:xfrm>
-          <a:prstGeom prst="rect">
-            <a:avLst/>
-          </a:prstGeom>
-          <a:noFill/>
-          <a:ln w="38100">
-            <a:solidFill>
-              <a:srgbClr val="FF0000"/>
-            </a:solidFill>
-          </a:ln>
-        </p:spPr>
-        <p:txBody>
-          <a:bodyPr wrap="square" rtlCol="0">
-            <a:spAutoFit/>
-          </a:bodyPr>
-          <a:lstStyle/>
-          <a:p>
-            <a:r>
-              <a:rPr lang="en-US" dirty="0" smtClean="0"/>
-              <a:t>LM estimate + CI</a:t>
-            </a:r>
-          </a:p>
-          <a:p>
-            <a:endParaRPr lang="en-US" dirty="0" smtClean="0"/>
-          </a:p>
-          <a:p>
-            <a:r>
-              <a:rPr lang="en-US" dirty="0" smtClean="0"/>
-              <a:t>CM mostly responds to elevation</a:t>
-            </a:r>
-          </a:p>
-          <a:p>
-            <a:endParaRPr lang="en-US" dirty="0"/>
-          </a:p>
-          <a:p>
-            <a:r>
-              <a:rPr lang="en-US" dirty="0" smtClean="0"/>
-              <a:t>CWM mostly responds to snow, GDD and elevation</a:t>
-            </a:r>
-          </a:p>
-          <a:p>
-            <a:endParaRPr lang="en-US" dirty="0"/>
-          </a:p>
-          <a:p>
-            <a:r>
-              <a:rPr lang="en-US" dirty="0" smtClean="0"/>
-              <a:t>Consistent  germination and plant traits responses in opposite directions!!</a:t>
-            </a:r>
-          </a:p>
-          <a:p>
-            <a:endParaRPr lang="en-US" dirty="0"/>
-          </a:p>
-        </p:txBody>
-      </p:sp>
-    </p:spTree>
-    <p:extLst>
-      <p:ext uri="{BB962C8B-B14F-4D97-AF65-F5344CB8AC3E}">
-        <p14:creationId xmlns:p14="http://schemas.microsoft.com/office/powerpoint/2010/main" val="3747278091"/>
-      </p:ext>
-    </p:extLst>
-  </p:cSld>
-  <p:clrMapOvr>
-    <a:masterClrMapping/>
-  </p:clrMapOvr>
-</p:sld>
-</file>
-
-<file path=ppt/slides/slide14.xml><?xml version="1.0" encoding="utf-8"?>
-<p:sld xmlns:a="http://schemas.openxmlformats.org/drawingml/2006/main" xmlns:r="http://schemas.openxmlformats.org/officeDocument/2006/relationships" xmlns:p="http://schemas.openxmlformats.org/presentationml/2006/main">
-  <p:cSld>
-    <p:spTree>
-      <p:nvGrpSpPr>
-        <p:cNvPr id="1" name=""/>
-        <p:cNvGrpSpPr/>
-        <p:nvPr/>
-      </p:nvGrpSpPr>
-      <p:grpSpPr>
-        <a:xfrm>
-          <a:off x="0" y="0"/>
-          <a:ext cx="0" cy="0"/>
-          <a:chOff x="0" y="0"/>
-          <a:chExt cx="0" cy="0"/>
-        </a:xfrm>
-      </p:grpSpPr>
-      <p:sp>
-        <p:nvSpPr>
-          <p:cNvPr id="2" name="Título 1"/>
-          <p:cNvSpPr>
-            <a:spLocks noGrp="1"/>
-          </p:cNvSpPr>
-          <p:nvPr>
-            <p:ph type="title"/>
-          </p:nvPr>
-        </p:nvSpPr>
-        <p:spPr/>
-        <p:txBody>
-          <a:bodyPr>
-            <a:normAutofit/>
-          </a:bodyPr>
-          <a:lstStyle/>
-          <a:p>
-            <a:r>
-              <a:rPr lang="en-US" sz="3600" dirty="0" smtClean="0"/>
-              <a:t>2. Community metrics along microclimatic gradients</a:t>
-            </a:r>
-            <a:endParaRPr lang="en-US" sz="3600" dirty="0"/>
-          </a:p>
-        </p:txBody>
-      </p:sp>
-      <p:pic>
-        <p:nvPicPr>
-          <p:cNvPr id="5" name="Marcador de contenido 4"/>
-          <p:cNvPicPr>
-            <a:picLocks noGrp="1" noChangeAspect="1"/>
-          </p:cNvPicPr>
-          <p:nvPr>
-            <p:ph idx="1"/>
-          </p:nvPr>
-        </p:nvPicPr>
-        <p:blipFill>
-          <a:blip r:embed="rId2" cstate="print">
-            <a:extLst>
-              <a:ext uri="{28A0092B-C50C-407E-A947-70E740481C1C}">
-                <a14:useLocalDpi xmlns:a14="http://schemas.microsoft.com/office/drawing/2010/main" val="0"/>
-              </a:ext>
-            </a:extLst>
-          </a:blip>
-          <a:stretch>
-            <a:fillRect/>
-          </a:stretch>
-        </p:blipFill>
-        <p:spPr>
-          <a:xfrm>
-            <a:off x="64893" y="1426233"/>
-            <a:ext cx="8971813" cy="4750729"/>
-          </a:xfrm>
-        </p:spPr>
-      </p:pic>
-      <p:sp>
-        <p:nvSpPr>
-          <p:cNvPr id="6" name="CuadroTexto 5"/>
-          <p:cNvSpPr txBox="1"/>
-          <p:nvPr/>
-        </p:nvSpPr>
-        <p:spPr>
-          <a:xfrm>
-            <a:off x="9209773" y="1929645"/>
-            <a:ext cx="2836710" cy="3416320"/>
-          </a:xfrm>
-          <a:prstGeom prst="rect">
-            <a:avLst/>
-          </a:prstGeom>
-          <a:noFill/>
-          <a:ln w="38100">
-            <a:solidFill>
-              <a:srgbClr val="FF0000"/>
-            </a:solidFill>
-          </a:ln>
-        </p:spPr>
-        <p:txBody>
-          <a:bodyPr wrap="square" rtlCol="0">
-            <a:spAutoFit/>
-          </a:bodyPr>
-          <a:lstStyle/>
-          <a:p>
-            <a:r>
-              <a:rPr lang="en-US" dirty="0" smtClean="0"/>
-              <a:t>LM estimate + CI</a:t>
-            </a:r>
-          </a:p>
-          <a:p>
-            <a:endParaRPr lang="en-US" dirty="0" smtClean="0"/>
-          </a:p>
-          <a:p>
-            <a:r>
-              <a:rPr lang="en-US" dirty="0" smtClean="0"/>
-              <a:t>CM mostly responds to elevation, GDD and FDD</a:t>
-            </a:r>
-          </a:p>
-          <a:p>
-            <a:endParaRPr lang="en-US" dirty="0"/>
-          </a:p>
-          <a:p>
-            <a:r>
-              <a:rPr lang="en-US" dirty="0" smtClean="0"/>
-              <a:t>CWM mostly responds to GDD and elevation</a:t>
-            </a:r>
-          </a:p>
-          <a:p>
-            <a:endParaRPr lang="en-US" dirty="0"/>
-          </a:p>
-          <a:p>
-            <a:r>
-              <a:rPr lang="en-US" dirty="0" smtClean="0"/>
-              <a:t>Germination and plant traits responses mostly in opposite directions!!</a:t>
-            </a:r>
-          </a:p>
-          <a:p>
-            <a:endParaRPr lang="en-US" dirty="0"/>
-          </a:p>
-        </p:txBody>
-      </p:sp>
-    </p:spTree>
-    <p:extLst>
-      <p:ext uri="{BB962C8B-B14F-4D97-AF65-F5344CB8AC3E}">
-        <p14:creationId xmlns:p14="http://schemas.microsoft.com/office/powerpoint/2010/main" val="2609244817"/>
-      </p:ext>
-    </p:extLst>
-  </p:cSld>
-  <p:clrMapOvr>
-    <a:masterClrMapping/>
-  </p:clrMapOvr>
-</p:sld>
-</file>
-
-<file path=ppt/slides/slide15.xml><?xml version="1.0" encoding="utf-8"?>
-<p:sld xmlns:a="http://schemas.openxmlformats.org/drawingml/2006/main" xmlns:r="http://schemas.openxmlformats.org/officeDocument/2006/relationships" xmlns:p="http://schemas.openxmlformats.org/presentationml/2006/main">
-  <p:cSld>
-    <p:spTree>
-      <p:nvGrpSpPr>
-        <p:cNvPr id="1" name=""/>
-        <p:cNvGrpSpPr/>
-        <p:nvPr/>
-      </p:nvGrpSpPr>
-      <p:grpSpPr>
-        <a:xfrm>
-          <a:off x="0" y="0"/>
-          <a:ext cx="0" cy="0"/>
-          <a:chOff x="0" y="0"/>
-          <a:chExt cx="0" cy="0"/>
-        </a:xfrm>
-      </p:grpSpPr>
-      <p:sp>
-        <p:nvSpPr>
-          <p:cNvPr id="2" name="Título 1"/>
-          <p:cNvSpPr>
-            <a:spLocks noGrp="1"/>
-          </p:cNvSpPr>
-          <p:nvPr>
-            <p:ph type="title"/>
-          </p:nvPr>
-        </p:nvSpPr>
-        <p:spPr/>
-        <p:txBody>
-          <a:bodyPr>
-            <a:normAutofit/>
-          </a:bodyPr>
-          <a:lstStyle/>
-          <a:p>
-            <a:r>
-              <a:rPr lang="en-US" sz="3600" dirty="0" smtClean="0"/>
-              <a:t>3.1 Germination and adult plant niche differentiation </a:t>
-            </a:r>
-            <a:endParaRPr lang="en-US" sz="3600" dirty="0"/>
-          </a:p>
-        </p:txBody>
-      </p:sp>
-      <p:pic>
-        <p:nvPicPr>
-          <p:cNvPr id="7" name="Marcador de contenido 6"/>
-          <p:cNvPicPr>
-            <a:picLocks noGrp="1" noChangeAspect="1"/>
-          </p:cNvPicPr>
-          <p:nvPr>
-            <p:ph idx="1"/>
-          </p:nvPr>
-        </p:nvPicPr>
-        <p:blipFill>
-          <a:blip r:embed="rId2" cstate="print">
-            <a:extLst>
-              <a:ext uri="{28A0092B-C50C-407E-A947-70E740481C1C}">
-                <a14:useLocalDpi xmlns:a14="http://schemas.microsoft.com/office/drawing/2010/main" val="0"/>
-              </a:ext>
-            </a:extLst>
-          </a:blip>
-          <a:stretch>
-            <a:fillRect/>
-          </a:stretch>
-        </p:blipFill>
-        <p:spPr>
-          <a:xfrm>
-            <a:off x="271370" y="1499518"/>
-            <a:ext cx="4353326" cy="4649960"/>
-          </a:xfrm>
-        </p:spPr>
-      </p:pic>
-      <p:pic>
-        <p:nvPicPr>
-          <p:cNvPr id="8" name="Imagen 7"/>
-          <p:cNvPicPr>
-            <a:picLocks noChangeAspect="1"/>
-          </p:cNvPicPr>
-          <p:nvPr/>
-        </p:nvPicPr>
-        <p:blipFill>
-          <a:blip r:embed="rId3" cstate="print">
-            <a:extLst>
-              <a:ext uri="{28A0092B-C50C-407E-A947-70E740481C1C}">
-                <a14:useLocalDpi xmlns:a14="http://schemas.microsoft.com/office/drawing/2010/main" val="0"/>
-              </a:ext>
-            </a:extLst>
-          </a:blip>
-          <a:stretch>
-            <a:fillRect/>
-          </a:stretch>
-        </p:blipFill>
-        <p:spPr>
-          <a:xfrm>
-            <a:off x="4694697" y="1499517"/>
-            <a:ext cx="4349013" cy="4645353"/>
-          </a:xfrm>
-          <a:prstGeom prst="rect">
-            <a:avLst/>
-          </a:prstGeom>
-        </p:spPr>
-      </p:pic>
-      <p:sp>
-        <p:nvSpPr>
-          <p:cNvPr id="9" name="CuadroTexto 8"/>
-          <p:cNvSpPr txBox="1"/>
-          <p:nvPr/>
-        </p:nvSpPr>
-        <p:spPr>
-          <a:xfrm>
-            <a:off x="9209773" y="1929645"/>
-            <a:ext cx="2836710" cy="2862322"/>
-          </a:xfrm>
-          <a:prstGeom prst="rect">
-            <a:avLst/>
-          </a:prstGeom>
-          <a:noFill/>
-          <a:ln w="38100">
-            <a:solidFill>
-              <a:srgbClr val="FF0000"/>
-            </a:solidFill>
-          </a:ln>
-        </p:spPr>
-        <p:txBody>
-          <a:bodyPr wrap="square" rtlCol="0">
-            <a:spAutoFit/>
-          </a:bodyPr>
-          <a:lstStyle/>
-          <a:p>
-            <a:r>
-              <a:rPr lang="en-US" dirty="0" smtClean="0"/>
-              <a:t>Mean + CI (t-test)</a:t>
-            </a:r>
-          </a:p>
-          <a:p>
-            <a:endParaRPr lang="en-US" dirty="0" smtClean="0"/>
-          </a:p>
-          <a:p>
-            <a:r>
-              <a:rPr lang="en-US" dirty="0" smtClean="0"/>
-              <a:t>Germination niche dissimilarity bigger than adult plant niche.</a:t>
-            </a:r>
-          </a:p>
-          <a:p>
-            <a:endParaRPr lang="en-US" dirty="0"/>
-          </a:p>
-          <a:p>
-            <a:r>
-              <a:rPr lang="en-US" dirty="0" smtClean="0"/>
-              <a:t>Both data types significant in mediterranean, only with presence/absence data in temperate. </a:t>
-            </a:r>
-            <a:endParaRPr lang="en-US" dirty="0"/>
-          </a:p>
-        </p:txBody>
-      </p:sp>
-    </p:spTree>
-    <p:extLst>
-      <p:ext uri="{BB962C8B-B14F-4D97-AF65-F5344CB8AC3E}">
-        <p14:creationId xmlns:p14="http://schemas.microsoft.com/office/powerpoint/2010/main" val="3853303510"/>
-      </p:ext>
-    </p:extLst>
-  </p:cSld>
-  <p:clrMapOvr>
-    <a:masterClrMapping/>
-  </p:clrMapOvr>
-</p:sld>
-</file>
-
-<file path=ppt/slides/slide16.xml><?xml version="1.0" encoding="utf-8"?>
-<p:sld xmlns:a="http://schemas.openxmlformats.org/drawingml/2006/main" xmlns:r="http://schemas.openxmlformats.org/officeDocument/2006/relationships" xmlns:p="http://schemas.openxmlformats.org/presentationml/2006/main">
-  <p:cSld>
-    <p:spTree>
-      <p:nvGrpSpPr>
-        <p:cNvPr id="1" name=""/>
-        <p:cNvGrpSpPr/>
-        <p:nvPr/>
-      </p:nvGrpSpPr>
-      <p:grpSpPr>
-        <a:xfrm>
-          <a:off x="0" y="0"/>
-          <a:ext cx="0" cy="0"/>
-          <a:chOff x="0" y="0"/>
-          <a:chExt cx="0" cy="0"/>
-        </a:xfrm>
-      </p:grpSpPr>
-      <p:sp>
-        <p:nvSpPr>
-          <p:cNvPr id="2" name="Título 1"/>
-          <p:cNvSpPr>
-            <a:spLocks noGrp="1"/>
-          </p:cNvSpPr>
-          <p:nvPr>
-            <p:ph type="title"/>
-          </p:nvPr>
-        </p:nvSpPr>
-        <p:spPr/>
-        <p:txBody>
-          <a:bodyPr/>
-          <a:lstStyle/>
-          <a:p>
-            <a:r>
-              <a:rPr lang="en-US" dirty="0" smtClean="0"/>
-              <a:t>3.2 FD along microclimatic gradients</a:t>
-            </a:r>
-            <a:endParaRPr lang="en-US" dirty="0"/>
-          </a:p>
-        </p:txBody>
-      </p:sp>
-      <p:pic>
-        <p:nvPicPr>
-          <p:cNvPr id="4" name="Marcador de contenido 3"/>
-          <p:cNvPicPr>
-            <a:picLocks noGrp="1" noChangeAspect="1"/>
-          </p:cNvPicPr>
-          <p:nvPr>
-            <p:ph idx="1"/>
-          </p:nvPr>
-        </p:nvPicPr>
-        <p:blipFill>
-          <a:blip r:embed="rId2" cstate="print">
-            <a:extLst>
-              <a:ext uri="{28A0092B-C50C-407E-A947-70E740481C1C}">
-                <a14:useLocalDpi xmlns:a14="http://schemas.microsoft.com/office/drawing/2010/main" val="0"/>
-              </a:ext>
-            </a:extLst>
-          </a:blip>
-          <a:stretch>
-            <a:fillRect/>
-          </a:stretch>
-        </p:blipFill>
-        <p:spPr>
-          <a:xfrm>
-            <a:off x="351797" y="1690688"/>
-            <a:ext cx="7860441" cy="4162239"/>
-          </a:xfrm>
-        </p:spPr>
-      </p:pic>
-      <p:sp>
-        <p:nvSpPr>
-          <p:cNvPr id="5" name="CuadroTexto 4"/>
-          <p:cNvSpPr txBox="1"/>
-          <p:nvPr/>
-        </p:nvSpPr>
-        <p:spPr>
-          <a:xfrm>
-            <a:off x="8364663" y="2132202"/>
-            <a:ext cx="3036399" cy="3139321"/>
-          </a:xfrm>
-          <a:prstGeom prst="rect">
-            <a:avLst/>
-          </a:prstGeom>
-          <a:noFill/>
-          <a:ln w="38100">
-            <a:solidFill>
-              <a:srgbClr val="FF0000"/>
-            </a:solidFill>
-          </a:ln>
-        </p:spPr>
-        <p:txBody>
-          <a:bodyPr wrap="square" rtlCol="0">
-            <a:spAutoFit/>
-          </a:bodyPr>
-          <a:lstStyle/>
-          <a:p>
-            <a:r>
-              <a:rPr lang="en-US" dirty="0" smtClean="0"/>
-              <a:t>LM parameter + CI </a:t>
-            </a:r>
-          </a:p>
-          <a:p>
-            <a:endParaRPr lang="en-US" dirty="0" smtClean="0"/>
-          </a:p>
-          <a:p>
-            <a:r>
-              <a:rPr lang="en-US" dirty="0" smtClean="0"/>
-              <a:t>Opposite trait differentiation trends between germination and adult plant niche. </a:t>
-            </a:r>
-          </a:p>
-          <a:p>
-            <a:endParaRPr lang="en-US" dirty="0"/>
-          </a:p>
-          <a:p>
-            <a:r>
-              <a:rPr lang="en-US" dirty="0" smtClean="0"/>
-              <a:t>Snow = germination divergent, plant convergent</a:t>
-            </a:r>
-          </a:p>
-          <a:p>
-            <a:endParaRPr lang="en-US" dirty="0"/>
-          </a:p>
-          <a:p>
-            <a:r>
-              <a:rPr lang="en-US" dirty="0" smtClean="0"/>
-              <a:t>Elevation = germination convergent, plant divergent</a:t>
-            </a:r>
-          </a:p>
-        </p:txBody>
-      </p:sp>
-    </p:spTree>
-    <p:extLst>
-      <p:ext uri="{BB962C8B-B14F-4D97-AF65-F5344CB8AC3E}">
-        <p14:creationId xmlns:p14="http://schemas.microsoft.com/office/powerpoint/2010/main" val="570511265"/>
-      </p:ext>
-    </p:extLst>
-  </p:cSld>
-  <p:clrMapOvr>
-    <a:masterClrMapping/>
-  </p:clrMapOvr>
-</p:sld>
-</file>
-
-<file path=ppt/slides/slide17.xml><?xml version="1.0" encoding="utf-8"?>
-<p:sld xmlns:a="http://schemas.openxmlformats.org/drawingml/2006/main" xmlns:r="http://schemas.openxmlformats.org/officeDocument/2006/relationships" xmlns:p="http://schemas.openxmlformats.org/presentationml/2006/main">
-  <p:cSld>
-    <p:spTree>
-      <p:nvGrpSpPr>
-        <p:cNvPr id="1" name=""/>
-        <p:cNvGrpSpPr/>
-        <p:nvPr/>
-      </p:nvGrpSpPr>
-      <p:grpSpPr>
-        <a:xfrm>
-          <a:off x="0" y="0"/>
-          <a:ext cx="0" cy="0"/>
-          <a:chOff x="0" y="0"/>
-          <a:chExt cx="0" cy="0"/>
-        </a:xfrm>
-      </p:grpSpPr>
-      <p:sp>
-        <p:nvSpPr>
-          <p:cNvPr id="2" name="Título 1"/>
-          <p:cNvSpPr>
-            <a:spLocks noGrp="1"/>
-          </p:cNvSpPr>
-          <p:nvPr>
-            <p:ph type="title"/>
-          </p:nvPr>
-        </p:nvSpPr>
-        <p:spPr/>
-        <p:txBody>
-          <a:bodyPr/>
-          <a:lstStyle/>
-          <a:p>
-            <a:r>
-              <a:rPr lang="en-US" dirty="0" smtClean="0"/>
-              <a:t>3.2 FD along microclimatic gradients</a:t>
-            </a:r>
-            <a:endParaRPr lang="en-US" dirty="0"/>
-          </a:p>
-        </p:txBody>
-      </p:sp>
-      <p:pic>
-        <p:nvPicPr>
-          <p:cNvPr id="7" name="Marcador de contenido 6"/>
-          <p:cNvPicPr>
-            <a:picLocks noGrp="1" noChangeAspect="1"/>
-          </p:cNvPicPr>
-          <p:nvPr>
-            <p:ph idx="1"/>
-          </p:nvPr>
-        </p:nvPicPr>
-        <p:blipFill>
-          <a:blip r:embed="rId2" cstate="print">
-            <a:extLst>
-              <a:ext uri="{28A0092B-C50C-407E-A947-70E740481C1C}">
-                <a14:useLocalDpi xmlns:a14="http://schemas.microsoft.com/office/drawing/2010/main" val="0"/>
-              </a:ext>
-            </a:extLst>
-          </a:blip>
-          <a:stretch>
-            <a:fillRect/>
-          </a:stretch>
-        </p:blipFill>
-        <p:spPr>
-          <a:xfrm>
-            <a:off x="254643" y="1506224"/>
-            <a:ext cx="7309414" cy="4490131"/>
-          </a:xfrm>
-        </p:spPr>
-      </p:pic>
-      <p:sp>
-        <p:nvSpPr>
-          <p:cNvPr id="8" name="CuadroTexto 7"/>
-          <p:cNvSpPr txBox="1"/>
-          <p:nvPr/>
-        </p:nvSpPr>
-        <p:spPr>
-          <a:xfrm>
-            <a:off x="7838015" y="2320128"/>
-            <a:ext cx="3620921" cy="2862322"/>
-          </a:xfrm>
-          <a:prstGeom prst="rect">
-            <a:avLst/>
-          </a:prstGeom>
-          <a:noFill/>
-          <a:ln w="38100">
-            <a:solidFill>
-              <a:srgbClr val="FF0000"/>
-            </a:solidFill>
-          </a:ln>
-        </p:spPr>
-        <p:txBody>
-          <a:bodyPr wrap="square" rtlCol="0">
-            <a:spAutoFit/>
-          </a:bodyPr>
-          <a:lstStyle/>
-          <a:p>
-            <a:r>
-              <a:rPr lang="en-US" dirty="0" smtClean="0"/>
-              <a:t>LM parameter + CI </a:t>
-            </a:r>
-          </a:p>
-          <a:p>
-            <a:endParaRPr lang="en-US" dirty="0" smtClean="0"/>
-          </a:p>
-          <a:p>
-            <a:r>
-              <a:rPr lang="en-US" dirty="0" smtClean="0"/>
-              <a:t>Opposite trait differentiation trends between germination and adult plant niche. </a:t>
-            </a:r>
-          </a:p>
-          <a:p>
-            <a:endParaRPr lang="en-US" dirty="0"/>
-          </a:p>
-          <a:p>
-            <a:r>
-              <a:rPr lang="en-US" dirty="0" smtClean="0"/>
-              <a:t>GDD = germination convergent, plant divergent</a:t>
-            </a:r>
-          </a:p>
-          <a:p>
-            <a:endParaRPr lang="en-US" dirty="0"/>
-          </a:p>
-          <a:p>
-            <a:r>
-              <a:rPr lang="en-US" dirty="0" smtClean="0"/>
-              <a:t>Elevation = germination divergent</a:t>
-            </a:r>
-          </a:p>
-        </p:txBody>
-      </p:sp>
-    </p:spTree>
-    <p:extLst>
-      <p:ext uri="{BB962C8B-B14F-4D97-AF65-F5344CB8AC3E}">
-        <p14:creationId xmlns:p14="http://schemas.microsoft.com/office/powerpoint/2010/main" val="1103088524"/>
-      </p:ext>
-    </p:extLst>
-  </p:cSld>
-  <p:clrMapOvr>
-    <a:masterClrMapping/>
-  </p:clrMapOvr>
-</p:sld>
-</file>
-
-<file path=ppt/slides/slide18.xml><?xml version="1.0" encoding="utf-8"?>
-<p:sld xmlns:a="http://schemas.openxmlformats.org/drawingml/2006/main" xmlns:r="http://schemas.openxmlformats.org/officeDocument/2006/relationships" xmlns:p="http://schemas.openxmlformats.org/presentationml/2006/main">
-  <p:cSld>
-    <p:spTree>
-      <p:nvGrpSpPr>
-        <p:cNvPr id="1" name=""/>
-        <p:cNvGrpSpPr/>
-        <p:nvPr/>
-      </p:nvGrpSpPr>
-      <p:grpSpPr>
-        <a:xfrm>
-          <a:off x="0" y="0"/>
-          <a:ext cx="0" cy="0"/>
-          <a:chOff x="0" y="0"/>
-          <a:chExt cx="0" cy="0"/>
-        </a:xfrm>
-      </p:grpSpPr>
-      <p:sp>
-        <p:nvSpPr>
-          <p:cNvPr id="2" name="Título 1"/>
-          <p:cNvSpPr>
-            <a:spLocks noGrp="1"/>
-          </p:cNvSpPr>
-          <p:nvPr>
-            <p:ph type="title"/>
-          </p:nvPr>
-        </p:nvSpPr>
-        <p:spPr/>
-        <p:txBody>
-          <a:bodyPr/>
-          <a:lstStyle/>
-          <a:p>
-            <a:r>
-              <a:rPr lang="en-US" dirty="0" smtClean="0"/>
-              <a:t>Answers to Objectives</a:t>
-            </a:r>
-            <a:endParaRPr lang="en-US" dirty="0"/>
-          </a:p>
-        </p:txBody>
-      </p:sp>
-      <p:sp>
-        <p:nvSpPr>
-          <p:cNvPr id="3" name="Marcador de contenido 2"/>
-          <p:cNvSpPr>
-            <a:spLocks noGrp="1"/>
-          </p:cNvSpPr>
-          <p:nvPr>
-            <p:ph idx="1"/>
-          </p:nvPr>
-        </p:nvSpPr>
-        <p:spPr/>
-        <p:txBody>
-          <a:bodyPr>
-            <a:normAutofit/>
-          </a:bodyPr>
-          <a:lstStyle/>
-          <a:p>
-            <a:pPr marL="514350" indent="-514350">
-              <a:buFont typeface="+mj-lt"/>
-              <a:buAutoNum type="arabicPeriod"/>
-            </a:pPr>
-            <a:r>
-              <a:rPr lang="en-US" dirty="0" smtClean="0">
-                <a:solidFill>
-                  <a:schemeClr val="bg2">
-                    <a:lumMod val="75000"/>
-                  </a:schemeClr>
-                </a:solidFill>
-              </a:rPr>
-              <a:t>Determine germination patterns to main drivers in alpine communities</a:t>
-            </a:r>
-          </a:p>
-          <a:p>
-            <a:pPr marL="0" indent="0">
-              <a:buNone/>
-            </a:pPr>
-            <a:endParaRPr lang="en-US" dirty="0"/>
-          </a:p>
-          <a:p>
-            <a:pPr marL="0" indent="0">
-              <a:buNone/>
-            </a:pPr>
-            <a:r>
-              <a:rPr lang="en-US" dirty="0" smtClean="0"/>
-              <a:t>Significantly worse germination in darkness and water stress</a:t>
-            </a:r>
-          </a:p>
-          <a:p>
-            <a:pPr marL="0" indent="0">
-              <a:buNone/>
-            </a:pPr>
-            <a:r>
-              <a:rPr lang="en-US" dirty="0" smtClean="0"/>
-              <a:t>Trend of higher germination in constant temperatures (probably because lower limit of alternating temperatures slowed germination speed or is below germination threshold).</a:t>
-            </a:r>
-          </a:p>
-          <a:p>
-            <a:pPr marL="457200" lvl="1" indent="0">
-              <a:buNone/>
-            </a:pPr>
-            <a:endParaRPr lang="en-US" dirty="0"/>
-          </a:p>
-        </p:txBody>
-      </p:sp>
-    </p:spTree>
-    <p:extLst>
-      <p:ext uri="{BB962C8B-B14F-4D97-AF65-F5344CB8AC3E}">
-        <p14:creationId xmlns:p14="http://schemas.microsoft.com/office/powerpoint/2010/main" val="554017038"/>
-      </p:ext>
-    </p:extLst>
-  </p:cSld>
-  <p:clrMapOvr>
-    <a:masterClrMapping/>
-  </p:clrMapOvr>
-</p:sld>
-</file>
-
-<file path=ppt/slides/slide19.xml><?xml version="1.0" encoding="utf-8"?>
-<p:sld xmlns:a="http://schemas.openxmlformats.org/drawingml/2006/main" xmlns:r="http://schemas.openxmlformats.org/officeDocument/2006/relationships" xmlns:p="http://schemas.openxmlformats.org/presentationml/2006/main">
-  <p:cSld>
-    <p:spTree>
-      <p:nvGrpSpPr>
-        <p:cNvPr id="1" name=""/>
-        <p:cNvGrpSpPr/>
-        <p:nvPr/>
-      </p:nvGrpSpPr>
-      <p:grpSpPr>
-        <a:xfrm>
-          <a:off x="0" y="0"/>
-          <a:ext cx="0" cy="0"/>
-          <a:chOff x="0" y="0"/>
-          <a:chExt cx="0" cy="0"/>
-        </a:xfrm>
-      </p:grpSpPr>
-      <p:sp>
-        <p:nvSpPr>
-          <p:cNvPr id="2" name="Título 1"/>
-          <p:cNvSpPr>
-            <a:spLocks noGrp="1"/>
-          </p:cNvSpPr>
-          <p:nvPr>
-            <p:ph type="title"/>
-          </p:nvPr>
-        </p:nvSpPr>
-        <p:spPr/>
-        <p:txBody>
-          <a:bodyPr/>
-          <a:lstStyle/>
-          <a:p>
-            <a:r>
-              <a:rPr lang="en-US" dirty="0" smtClean="0"/>
-              <a:t>Answers to Objectives</a:t>
-            </a:r>
-            <a:endParaRPr lang="en-US" dirty="0"/>
-          </a:p>
-        </p:txBody>
-      </p:sp>
-      <p:sp>
-        <p:nvSpPr>
-          <p:cNvPr id="3" name="Marcador de contenido 2"/>
-          <p:cNvSpPr>
-            <a:spLocks noGrp="1"/>
-          </p:cNvSpPr>
-          <p:nvPr>
-            <p:ph idx="1"/>
-          </p:nvPr>
-        </p:nvSpPr>
-        <p:spPr/>
-        <p:txBody>
-          <a:bodyPr>
-            <a:normAutofit fontScale="92500" lnSpcReduction="20000"/>
-          </a:bodyPr>
-          <a:lstStyle/>
-          <a:p>
-            <a:pPr marL="0" indent="0">
-              <a:buNone/>
-            </a:pPr>
-            <a:r>
-              <a:rPr lang="en-US" dirty="0" smtClean="0">
-                <a:solidFill>
-                  <a:schemeClr val="bg2">
-                    <a:lumMod val="75000"/>
-                  </a:schemeClr>
-                </a:solidFill>
-              </a:rPr>
-              <a:t>2. Explore relationships between CM/CWM and microclimatic gradients</a:t>
-            </a:r>
-          </a:p>
-          <a:p>
-            <a:pPr marL="0" indent="0">
-              <a:buNone/>
-            </a:pPr>
-            <a:endParaRPr lang="en-US" dirty="0">
-              <a:solidFill>
-                <a:schemeClr val="bg2">
-                  <a:lumMod val="75000"/>
-                </a:schemeClr>
-              </a:solidFill>
-            </a:endParaRPr>
-          </a:p>
-          <a:p>
-            <a:pPr marL="0" indent="0">
-              <a:buNone/>
-            </a:pPr>
-            <a:r>
-              <a:rPr lang="en-US" dirty="0" smtClean="0"/>
-              <a:t>Different responses in each community probably due to distinct environmental limitations (some even opposite).</a:t>
-            </a:r>
-          </a:p>
-          <a:p>
-            <a:pPr marL="0" indent="0">
-              <a:buNone/>
-            </a:pPr>
-            <a:r>
-              <a:rPr lang="en-US" dirty="0" smtClean="0"/>
-              <a:t>Different responses depending on CM or CWM</a:t>
-            </a:r>
-          </a:p>
-          <a:p>
-            <a:pPr marL="0" indent="0">
-              <a:buNone/>
-            </a:pPr>
-            <a:endParaRPr lang="en-US" dirty="0"/>
-          </a:p>
-          <a:p>
-            <a:pPr marL="0" indent="0">
-              <a:buNone/>
-            </a:pPr>
-            <a:r>
-              <a:rPr lang="en-US" dirty="0" smtClean="0"/>
-              <a:t>CM mostly respond to elevation (with only 100-200 m range)</a:t>
-            </a:r>
-          </a:p>
-          <a:p>
-            <a:pPr marL="0" indent="0">
-              <a:buNone/>
-            </a:pPr>
-            <a:r>
-              <a:rPr lang="en-US" dirty="0" smtClean="0"/>
-              <a:t>CWM to snow and GDD in mediterranean, only GDD in temperate</a:t>
-            </a:r>
-          </a:p>
-          <a:p>
-            <a:pPr marL="0" indent="0">
-              <a:buNone/>
-            </a:pPr>
-            <a:endParaRPr lang="en-US" dirty="0"/>
-          </a:p>
-          <a:p>
-            <a:pPr marL="0" indent="0">
-              <a:buNone/>
-            </a:pPr>
-            <a:r>
-              <a:rPr lang="en-US" dirty="0" smtClean="0"/>
-              <a:t>Opposite germination and adult plant relationships with environment (always in mediterranean, mostly in temperate)</a:t>
-            </a:r>
-            <a:endParaRPr lang="en-US" dirty="0"/>
-          </a:p>
-        </p:txBody>
-      </p:sp>
-    </p:spTree>
-    <p:extLst>
-      <p:ext uri="{BB962C8B-B14F-4D97-AF65-F5344CB8AC3E}">
-        <p14:creationId xmlns:p14="http://schemas.microsoft.com/office/powerpoint/2010/main" val="3478497478"/>
-      </p:ext>
-    </p:extLst>
-  </p:cSld>
-  <p:clrMapOvr>
-    <a:masterClrMapping/>
-  </p:clrMapOvr>
-</p:sld>
-</file>
-
-<file path=ppt/slides/slide2.xml><?xml version="1.0" encoding="utf-8"?>
-<p:sld xmlns:a="http://schemas.openxmlformats.org/drawingml/2006/main" xmlns:r="http://schemas.openxmlformats.org/officeDocument/2006/relationships" xmlns:p="http://schemas.openxmlformats.org/presentationml/2006/main">
-  <p:cSld>
-    <p:spTree>
-      <p:nvGrpSpPr>
-        <p:cNvPr id="1" name=""/>
-        <p:cNvGrpSpPr/>
-        <p:nvPr/>
-      </p:nvGrpSpPr>
-      <p:grpSpPr>
-        <a:xfrm>
-          <a:off x="0" y="0"/>
-          <a:ext cx="0" cy="0"/>
-          <a:chOff x="0" y="0"/>
-          <a:chExt cx="0" cy="0"/>
-        </a:xfrm>
-      </p:grpSpPr>
-      <p:sp>
-        <p:nvSpPr>
-          <p:cNvPr id="2" name="Título 1"/>
-          <p:cNvSpPr>
-            <a:spLocks noGrp="1"/>
-          </p:cNvSpPr>
-          <p:nvPr>
-            <p:ph type="title"/>
-          </p:nvPr>
-        </p:nvSpPr>
-        <p:spPr/>
-        <p:txBody>
-          <a:bodyPr/>
-          <a:lstStyle/>
-          <a:p>
-            <a:r>
-              <a:rPr lang="en-US" dirty="0" smtClean="0"/>
-              <a:t>Main introductory points</a:t>
-            </a:r>
-            <a:endParaRPr lang="en-US" dirty="0"/>
-          </a:p>
-        </p:txBody>
-      </p:sp>
-      <p:sp>
-        <p:nvSpPr>
-          <p:cNvPr id="3" name="Marcador de contenido 2"/>
-          <p:cNvSpPr>
-            <a:spLocks noGrp="1"/>
-          </p:cNvSpPr>
-          <p:nvPr>
-            <p:ph idx="1"/>
-          </p:nvPr>
-        </p:nvSpPr>
-        <p:spPr>
-          <a:xfrm>
-            <a:off x="838200" y="1559408"/>
-            <a:ext cx="10515600" cy="4351338"/>
-          </a:xfrm>
-        </p:spPr>
-        <p:txBody>
-          <a:bodyPr/>
-          <a:lstStyle/>
-          <a:p>
-            <a:r>
-              <a:rPr lang="en-US" dirty="0" smtClean="0"/>
-              <a:t>High alpine diversity partly due to niche differentiation </a:t>
-            </a:r>
-          </a:p>
-          <a:p>
-            <a:pPr marL="0" indent="0">
-              <a:buNone/>
-            </a:pPr>
-            <a:endParaRPr lang="en-US" dirty="0" smtClean="0"/>
-          </a:p>
-          <a:p>
-            <a:r>
-              <a:rPr lang="en-US" dirty="0" smtClean="0"/>
-              <a:t>Niche differentiation expected mainly due to harsh environment</a:t>
-            </a:r>
-          </a:p>
-          <a:p>
-            <a:pPr marL="0" indent="0">
-              <a:buNone/>
-            </a:pPr>
-            <a:endParaRPr lang="en-US" dirty="0" smtClean="0"/>
-          </a:p>
-          <a:p>
-            <a:r>
-              <a:rPr lang="en-US" dirty="0" smtClean="0"/>
-              <a:t>Other studies focused on niche-based processes using traits/phylogeny</a:t>
-            </a:r>
-          </a:p>
-          <a:p>
-            <a:pPr marL="0" indent="0">
-              <a:buNone/>
-            </a:pPr>
-            <a:endParaRPr lang="en-US" dirty="0" smtClean="0"/>
-          </a:p>
-          <a:p>
-            <a:r>
-              <a:rPr lang="en-US" dirty="0" smtClean="0"/>
-              <a:t>Regeneration traits hardly considered, only seed mass, BUT….</a:t>
-            </a:r>
-          </a:p>
-          <a:p>
-            <a:pPr marL="0" indent="0">
-              <a:buNone/>
-            </a:pPr>
-            <a:endParaRPr lang="en-US" dirty="0"/>
-          </a:p>
-        </p:txBody>
-      </p:sp>
-    </p:spTree>
-    <p:extLst>
-      <p:ext uri="{BB962C8B-B14F-4D97-AF65-F5344CB8AC3E}">
-        <p14:creationId xmlns:p14="http://schemas.microsoft.com/office/powerpoint/2010/main" val="3843949688"/>
-      </p:ext>
-    </p:extLst>
-  </p:cSld>
-  <p:clrMapOvr>
-    <a:masterClrMapping/>
-  </p:clrMapOvr>
-</p:sld>
-</file>
-
-<file path=ppt/slides/slide20.xml><?xml version="1.0" encoding="utf-8"?>
-<p:sld xmlns:a="http://schemas.openxmlformats.org/drawingml/2006/main" xmlns:r="http://schemas.openxmlformats.org/officeDocument/2006/relationships" xmlns:p="http://schemas.openxmlformats.org/presentationml/2006/main">
-  <p:cSld>
-    <p:spTree>
-      <p:nvGrpSpPr>
-        <p:cNvPr id="1" name=""/>
-        <p:cNvGrpSpPr/>
-        <p:nvPr/>
-      </p:nvGrpSpPr>
-      <p:grpSpPr>
-        <a:xfrm>
-          <a:off x="0" y="0"/>
-          <a:ext cx="0" cy="0"/>
-          <a:chOff x="0" y="0"/>
-          <a:chExt cx="0" cy="0"/>
-        </a:xfrm>
-      </p:grpSpPr>
-      <p:sp>
-        <p:nvSpPr>
-          <p:cNvPr id="2" name="Título 1"/>
-          <p:cNvSpPr>
-            <a:spLocks noGrp="1"/>
-          </p:cNvSpPr>
-          <p:nvPr>
-            <p:ph type="title"/>
-          </p:nvPr>
-        </p:nvSpPr>
-        <p:spPr/>
-        <p:txBody>
-          <a:bodyPr/>
-          <a:lstStyle/>
-          <a:p>
-            <a:r>
-              <a:rPr lang="en-US" dirty="0" smtClean="0"/>
-              <a:t>Answers to Objectives</a:t>
-            </a:r>
-            <a:endParaRPr lang="en-US" dirty="0"/>
-          </a:p>
-        </p:txBody>
-      </p:sp>
-      <p:sp>
-        <p:nvSpPr>
-          <p:cNvPr id="3" name="Marcador de contenido 2"/>
-          <p:cNvSpPr>
-            <a:spLocks noGrp="1"/>
-          </p:cNvSpPr>
-          <p:nvPr>
-            <p:ph idx="1"/>
-          </p:nvPr>
-        </p:nvSpPr>
-        <p:spPr/>
-        <p:txBody>
-          <a:bodyPr>
-            <a:normAutofit/>
-          </a:bodyPr>
-          <a:lstStyle/>
-          <a:p>
-            <a:pPr marL="0" indent="0">
-              <a:buNone/>
-            </a:pPr>
-            <a:r>
-              <a:rPr lang="en-US" dirty="0" smtClean="0">
-                <a:solidFill>
-                  <a:schemeClr val="bg2">
-                    <a:lumMod val="75000"/>
-                  </a:schemeClr>
-                </a:solidFill>
-              </a:rPr>
-              <a:t>3.1. Compare germination and adult plant niche dissimilarities</a:t>
-            </a:r>
-          </a:p>
-          <a:p>
-            <a:pPr marL="0" indent="0">
-              <a:buNone/>
-            </a:pPr>
-            <a:endParaRPr lang="en-US" dirty="0" smtClean="0"/>
-          </a:p>
-          <a:p>
-            <a:pPr marL="0" indent="0">
-              <a:buNone/>
-            </a:pPr>
-            <a:r>
-              <a:rPr lang="en-US" dirty="0" smtClean="0"/>
-              <a:t>Germination niche dissimilarity bigger than adult plant niche (corroborating Grubb’s hypothesis)</a:t>
-            </a:r>
-          </a:p>
-          <a:p>
-            <a:endParaRPr lang="en-US" dirty="0" smtClean="0"/>
-          </a:p>
-          <a:p>
-            <a:pPr marL="0" indent="0">
-              <a:buNone/>
-            </a:pPr>
-            <a:r>
-              <a:rPr lang="en-US" dirty="0" smtClean="0"/>
-              <a:t>Both data types significant in mediterranean, only with presence/absence data in temperate. </a:t>
-            </a:r>
-          </a:p>
-          <a:p>
-            <a:pPr marL="0" indent="0">
-              <a:buNone/>
-            </a:pPr>
-            <a:endParaRPr lang="en-US" dirty="0" smtClean="0"/>
-          </a:p>
-        </p:txBody>
-      </p:sp>
-    </p:spTree>
-    <p:extLst>
-      <p:ext uri="{BB962C8B-B14F-4D97-AF65-F5344CB8AC3E}">
-        <p14:creationId xmlns:p14="http://schemas.microsoft.com/office/powerpoint/2010/main" val="265753111"/>
-      </p:ext>
-    </p:extLst>
-  </p:cSld>
-  <p:clrMapOvr>
-    <a:masterClrMapping/>
-  </p:clrMapOvr>
-</p:sld>
-</file>
-
-<file path=ppt/slides/slide21.xml><?xml version="1.0" encoding="utf-8"?>
-<p:sld xmlns:a="http://schemas.openxmlformats.org/drawingml/2006/main" xmlns:r="http://schemas.openxmlformats.org/officeDocument/2006/relationships" xmlns:p="http://schemas.openxmlformats.org/presentationml/2006/main">
-  <p:cSld>
-    <p:spTree>
-      <p:nvGrpSpPr>
-        <p:cNvPr id="1" name=""/>
-        <p:cNvGrpSpPr/>
-        <p:nvPr/>
-      </p:nvGrpSpPr>
-      <p:grpSpPr>
-        <a:xfrm>
-          <a:off x="0" y="0"/>
-          <a:ext cx="0" cy="0"/>
-          <a:chOff x="0" y="0"/>
-          <a:chExt cx="0" cy="0"/>
-        </a:xfrm>
-      </p:grpSpPr>
-      <p:sp>
-        <p:nvSpPr>
-          <p:cNvPr id="2" name="Título 1"/>
-          <p:cNvSpPr>
-            <a:spLocks noGrp="1"/>
-          </p:cNvSpPr>
-          <p:nvPr>
-            <p:ph type="title"/>
-          </p:nvPr>
-        </p:nvSpPr>
-        <p:spPr/>
-        <p:txBody>
-          <a:bodyPr/>
-          <a:lstStyle/>
-          <a:p>
-            <a:r>
-              <a:rPr lang="en-US" dirty="0" smtClean="0"/>
-              <a:t>Answers to Objectives</a:t>
-            </a:r>
-            <a:endParaRPr lang="en-US" dirty="0"/>
-          </a:p>
-        </p:txBody>
-      </p:sp>
-      <p:sp>
-        <p:nvSpPr>
-          <p:cNvPr id="3" name="Marcador de contenido 2"/>
-          <p:cNvSpPr>
-            <a:spLocks noGrp="1"/>
-          </p:cNvSpPr>
-          <p:nvPr>
-            <p:ph idx="1"/>
-          </p:nvPr>
-        </p:nvSpPr>
-        <p:spPr/>
-        <p:txBody>
-          <a:bodyPr>
-            <a:normAutofit lnSpcReduction="10000"/>
-          </a:bodyPr>
-          <a:lstStyle/>
-          <a:p>
-            <a:pPr marL="0" indent="0">
-              <a:buNone/>
-            </a:pPr>
-            <a:r>
-              <a:rPr lang="en-US" dirty="0" smtClean="0">
-                <a:solidFill>
-                  <a:schemeClr val="bg2">
-                    <a:lumMod val="75000"/>
-                  </a:schemeClr>
-                </a:solidFill>
-              </a:rPr>
-              <a:t>3.2. Relationships between FD and microclimatic gradients</a:t>
-            </a:r>
-          </a:p>
-          <a:p>
-            <a:pPr marL="0" indent="0">
-              <a:buNone/>
-            </a:pPr>
-            <a:r>
-              <a:rPr lang="en-US" dirty="0" smtClean="0"/>
-              <a:t>Opposite trait differentiation trends between germination and adult plant niche. </a:t>
-            </a:r>
-          </a:p>
-          <a:p>
-            <a:endParaRPr lang="en-US" dirty="0" smtClean="0"/>
-          </a:p>
-          <a:p>
-            <a:pPr marL="0" indent="0">
-              <a:buNone/>
-            </a:pPr>
-            <a:r>
-              <a:rPr lang="en-US" dirty="0" smtClean="0"/>
-              <a:t>Snow = germination divergent, plant convergent (Mediterranean)</a:t>
-            </a:r>
-          </a:p>
-          <a:p>
-            <a:endParaRPr lang="en-US" dirty="0" smtClean="0"/>
-          </a:p>
-          <a:p>
-            <a:pPr marL="0" indent="0">
-              <a:buNone/>
-            </a:pPr>
-            <a:r>
-              <a:rPr lang="en-US" dirty="0" smtClean="0"/>
-              <a:t>Elevation = germination convergent, plant divergent (Mediterranean)</a:t>
-            </a:r>
-          </a:p>
-          <a:p>
-            <a:pPr marL="0" indent="0">
-              <a:buNone/>
-            </a:pPr>
-            <a:endParaRPr lang="en-US" dirty="0" smtClean="0"/>
-          </a:p>
-          <a:p>
-            <a:pPr marL="0" indent="0">
-              <a:buNone/>
-            </a:pPr>
-            <a:r>
-              <a:rPr lang="en-US" dirty="0" smtClean="0"/>
-              <a:t>GDD = germination convergent, plant divergent (Temperate)</a:t>
-            </a:r>
-          </a:p>
-          <a:p>
-            <a:pPr marL="0" indent="0">
-              <a:buNone/>
-            </a:pPr>
-            <a:endParaRPr lang="en-US" dirty="0" smtClean="0"/>
-          </a:p>
-        </p:txBody>
-      </p:sp>
-    </p:spTree>
-    <p:extLst>
-      <p:ext uri="{BB962C8B-B14F-4D97-AF65-F5344CB8AC3E}">
-        <p14:creationId xmlns:p14="http://schemas.microsoft.com/office/powerpoint/2010/main" val="3271350049"/>
-      </p:ext>
-    </p:extLst>
-  </p:cSld>
-  <p:clrMapOvr>
-    <a:masterClrMapping/>
-  </p:clrMapOvr>
-</p:sld>
-</file>
-
-<file path=ppt/slides/slide22.xml><?xml version="1.0" encoding="utf-8"?>
-<p:sld xmlns:a="http://schemas.openxmlformats.org/drawingml/2006/main" xmlns:r="http://schemas.openxmlformats.org/officeDocument/2006/relationships" xmlns:p="http://schemas.openxmlformats.org/presentationml/2006/main">
-  <p:cSld>
-    <p:spTree>
-      <p:nvGrpSpPr>
-        <p:cNvPr id="1" name=""/>
-        <p:cNvGrpSpPr/>
-        <p:nvPr/>
-      </p:nvGrpSpPr>
-      <p:grpSpPr>
-        <a:xfrm>
-          <a:off x="0" y="0"/>
-          <a:ext cx="0" cy="0"/>
-          <a:chOff x="0" y="0"/>
-          <a:chExt cx="0" cy="0"/>
-        </a:xfrm>
-      </p:grpSpPr>
-      <p:sp>
-        <p:nvSpPr>
-          <p:cNvPr id="2" name="Título 1"/>
-          <p:cNvSpPr>
-            <a:spLocks noGrp="1"/>
-          </p:cNvSpPr>
-          <p:nvPr>
-            <p:ph type="title"/>
-          </p:nvPr>
-        </p:nvSpPr>
-        <p:spPr/>
-        <p:txBody>
-          <a:bodyPr/>
-          <a:lstStyle/>
-          <a:p>
-            <a:r>
-              <a:rPr lang="en-US" dirty="0" smtClean="0"/>
-              <a:t>Some help with interpretation?</a:t>
-            </a:r>
-            <a:endParaRPr lang="en-US" dirty="0"/>
-          </a:p>
-        </p:txBody>
-      </p:sp>
-      <p:sp>
-        <p:nvSpPr>
-          <p:cNvPr id="3" name="Marcador de contenido 2"/>
-          <p:cNvSpPr>
-            <a:spLocks noGrp="1"/>
-          </p:cNvSpPr>
-          <p:nvPr>
-            <p:ph idx="1"/>
-          </p:nvPr>
-        </p:nvSpPr>
-        <p:spPr/>
-        <p:txBody>
-          <a:bodyPr/>
-          <a:lstStyle/>
-          <a:p>
-            <a:endParaRPr lang="en-US"/>
-          </a:p>
-        </p:txBody>
-      </p:sp>
-    </p:spTree>
-    <p:extLst>
-      <p:ext uri="{BB962C8B-B14F-4D97-AF65-F5344CB8AC3E}">
-        <p14:creationId xmlns:p14="http://schemas.microsoft.com/office/powerpoint/2010/main" val="2671523313"/>
-      </p:ext>
-    </p:extLst>
-  </p:cSld>
-  <p:clrMapOvr>
-    <a:masterClrMapping/>
-  </p:clrMapOvr>
-</p:sld>
-</file>
-
-<file path=ppt/slides/slide3.xml><?xml version="1.0" encoding="utf-8"?>
-<p:sld xmlns:a="http://schemas.openxmlformats.org/drawingml/2006/main" xmlns:r="http://schemas.openxmlformats.org/officeDocument/2006/relationships" xmlns:p="http://schemas.openxmlformats.org/presentationml/2006/main">
-  <p:cSld>
-    <p:spTree>
-      <p:nvGrpSpPr>
-        <p:cNvPr id="1" name=""/>
-        <p:cNvGrpSpPr/>
-        <p:nvPr/>
-      </p:nvGrpSpPr>
-      <p:grpSpPr>
-        <a:xfrm>
-          <a:off x="0" y="0"/>
-          <a:ext cx="0" cy="0"/>
-          <a:chOff x="0" y="0"/>
-          <a:chExt cx="0" cy="0"/>
-        </a:xfrm>
-      </p:grpSpPr>
-      <p:sp>
-        <p:nvSpPr>
-          <p:cNvPr id="2" name="Título 1"/>
-          <p:cNvSpPr>
-            <a:spLocks noGrp="1"/>
-          </p:cNvSpPr>
-          <p:nvPr>
-            <p:ph type="title"/>
-          </p:nvPr>
-        </p:nvSpPr>
-        <p:spPr/>
-        <p:txBody>
-          <a:bodyPr/>
-          <a:lstStyle/>
-          <a:p>
-            <a:r>
-              <a:rPr lang="en-US" dirty="0" smtClean="0"/>
-              <a:t>Main introductory points</a:t>
-            </a:r>
-            <a:endParaRPr lang="en-US" dirty="0"/>
-          </a:p>
-        </p:txBody>
-      </p:sp>
-      <p:sp>
-        <p:nvSpPr>
-          <p:cNvPr id="3" name="Marcador de contenido 2"/>
-          <p:cNvSpPr>
-            <a:spLocks noGrp="1"/>
-          </p:cNvSpPr>
-          <p:nvPr>
-            <p:ph idx="1"/>
-          </p:nvPr>
-        </p:nvSpPr>
-        <p:spPr>
-          <a:xfrm>
-            <a:off x="838200" y="1559408"/>
-            <a:ext cx="10515600" cy="4351338"/>
-          </a:xfrm>
-        </p:spPr>
-        <p:txBody>
-          <a:bodyPr>
-            <a:normAutofit lnSpcReduction="10000"/>
-          </a:bodyPr>
-          <a:lstStyle/>
-          <a:p>
-            <a:r>
-              <a:rPr lang="en-US" dirty="0" smtClean="0"/>
-              <a:t>Grubb’s theory says that:</a:t>
-            </a:r>
-          </a:p>
-          <a:p>
-            <a:pPr marL="0" indent="0">
-              <a:buNone/>
-            </a:pPr>
-            <a:endParaRPr lang="en-US" dirty="0" smtClean="0"/>
-          </a:p>
-          <a:p>
-            <a:pPr marL="0" indent="0">
-              <a:buNone/>
-            </a:pPr>
-            <a:r>
-              <a:rPr lang="en-US" dirty="0" smtClean="0"/>
-              <a:t>Regeneration niche differentiation </a:t>
-            </a:r>
-            <a:r>
-              <a:rPr lang="en-US" dirty="0" smtClean="0">
-                <a:solidFill>
-                  <a:srgbClr val="FF0000"/>
-                </a:solidFill>
-              </a:rPr>
-              <a:t>&gt;&gt;</a:t>
-            </a:r>
-            <a:r>
-              <a:rPr lang="en-US" dirty="0" smtClean="0"/>
-              <a:t> Adult plant niche differentiation</a:t>
-            </a:r>
-          </a:p>
-          <a:p>
-            <a:pPr marL="0" indent="0">
-              <a:buNone/>
-            </a:pPr>
-            <a:endParaRPr lang="en-US" dirty="0" smtClean="0"/>
-          </a:p>
-          <a:p>
-            <a:r>
-              <a:rPr lang="en-US" dirty="0" smtClean="0"/>
-              <a:t>Plenty literature about diversity in regeneration trait but NO empirically based comparison between both sets of traits</a:t>
-            </a:r>
-          </a:p>
-          <a:p>
-            <a:pPr marL="0" indent="0">
-              <a:buNone/>
-            </a:pPr>
-            <a:endParaRPr lang="en-US" dirty="0" smtClean="0"/>
-          </a:p>
-          <a:p>
-            <a:r>
-              <a:rPr lang="en-US" dirty="0" smtClean="0"/>
-              <a:t>Additionally, microclimatic conditions are known to be very important in alpine compositional and functional diversity of adult plants (existing literature) as well as for germination (almost no literature)</a:t>
-            </a:r>
-            <a:endParaRPr lang="en-US" dirty="0" smtClean="0"/>
-          </a:p>
-          <a:p>
-            <a:pPr marL="0" indent="0">
-              <a:buNone/>
-            </a:pPr>
-            <a:endParaRPr lang="en-US" dirty="0"/>
-          </a:p>
-        </p:txBody>
-      </p:sp>
-    </p:spTree>
-    <p:extLst>
-      <p:ext uri="{BB962C8B-B14F-4D97-AF65-F5344CB8AC3E}">
-        <p14:creationId xmlns:p14="http://schemas.microsoft.com/office/powerpoint/2010/main" val="2657494604"/>
-      </p:ext>
-    </p:extLst>
-  </p:cSld>
-  <p:clrMapOvr>
-    <a:masterClrMapping/>
-  </p:clrMapOvr>
-</p:sld>
-</file>
-
-<file path=ppt/slides/slide4.xml><?xml version="1.0" encoding="utf-8"?>
-<p:sld xmlns:a="http://schemas.openxmlformats.org/drawingml/2006/main" xmlns:r="http://schemas.openxmlformats.org/officeDocument/2006/relationships" xmlns:p="http://schemas.openxmlformats.org/presentationml/2006/main">
-  <p:cSld>
-    <p:spTree>
-      <p:nvGrpSpPr>
-        <p:cNvPr id="1" name=""/>
-        <p:cNvGrpSpPr/>
-        <p:nvPr/>
-      </p:nvGrpSpPr>
-      <p:grpSpPr>
-        <a:xfrm>
-          <a:off x="0" y="0"/>
-          <a:ext cx="0" cy="0"/>
-          <a:chOff x="0" y="0"/>
-          <a:chExt cx="0" cy="0"/>
-        </a:xfrm>
-      </p:grpSpPr>
-      <p:sp>
-        <p:nvSpPr>
-          <p:cNvPr id="2" name="Título 1"/>
-          <p:cNvSpPr>
-            <a:spLocks noGrp="1"/>
-          </p:cNvSpPr>
-          <p:nvPr>
-            <p:ph type="title"/>
-          </p:nvPr>
-        </p:nvSpPr>
-        <p:spPr/>
-        <p:txBody>
-          <a:bodyPr/>
-          <a:lstStyle/>
-          <a:p>
-            <a:r>
-              <a:rPr lang="en-US" dirty="0" smtClean="0"/>
-              <a:t>Main goal</a:t>
-            </a:r>
-            <a:endParaRPr lang="en-US" dirty="0"/>
-          </a:p>
-        </p:txBody>
-      </p:sp>
-      <p:sp>
-        <p:nvSpPr>
-          <p:cNvPr id="3" name="Marcador de contenido 2"/>
-          <p:cNvSpPr>
-            <a:spLocks noGrp="1"/>
-          </p:cNvSpPr>
-          <p:nvPr>
-            <p:ph idx="1"/>
-          </p:nvPr>
-        </p:nvSpPr>
-        <p:spPr>
-          <a:xfrm>
-            <a:off x="791902" y="1690688"/>
-            <a:ext cx="10515600" cy="4351338"/>
-          </a:xfrm>
-        </p:spPr>
-        <p:txBody>
-          <a:bodyPr>
-            <a:normAutofit/>
-          </a:bodyPr>
-          <a:lstStyle/>
-          <a:p>
-            <a:r>
-              <a:rPr lang="en-US" dirty="0" smtClean="0"/>
-              <a:t>Study germination niche dissimilarity pattern:</a:t>
-            </a:r>
-          </a:p>
-          <a:p>
-            <a:pPr lvl="1"/>
-            <a:r>
-              <a:rPr lang="en-US" dirty="0" smtClean="0"/>
-              <a:t>With community level metrics (CM/CWM and Functional divergence indices).</a:t>
-            </a:r>
-          </a:p>
-          <a:p>
-            <a:pPr lvl="1"/>
-            <a:r>
-              <a:rPr lang="en-US" dirty="0" smtClean="0"/>
-              <a:t>Empirical data for germination (3 traits) and adult plant traits (5 traits).</a:t>
-            </a:r>
-          </a:p>
-          <a:p>
-            <a:pPr lvl="1"/>
-            <a:r>
-              <a:rPr lang="en-US" dirty="0" smtClean="0"/>
-              <a:t>Detailed field measured microclimatic gradients in two communities.</a:t>
-            </a:r>
-            <a:endParaRPr lang="en-US" dirty="0"/>
-          </a:p>
-          <a:p>
-            <a:endParaRPr lang="en-US" dirty="0" smtClean="0"/>
-          </a:p>
-          <a:p>
-            <a:r>
-              <a:rPr lang="en-US" dirty="0" smtClean="0"/>
-              <a:t>To our knowledge no one has tested it empirically</a:t>
-            </a:r>
-          </a:p>
-        </p:txBody>
-      </p:sp>
-    </p:spTree>
-    <p:extLst>
-      <p:ext uri="{BB962C8B-B14F-4D97-AF65-F5344CB8AC3E}">
-        <p14:creationId xmlns:p14="http://schemas.microsoft.com/office/powerpoint/2010/main" val="78482830"/>
-      </p:ext>
-    </p:extLst>
-  </p:cSld>
-  <p:clrMapOvr>
-    <a:masterClrMapping/>
-  </p:clrMapOvr>
-</p:sld>
-</file>
-
-<file path=ppt/slides/slide5.xml><?xml version="1.0" encoding="utf-8"?>
-<p:sld xmlns:a="http://schemas.openxmlformats.org/drawingml/2006/main" xmlns:r="http://schemas.openxmlformats.org/officeDocument/2006/relationships" xmlns:p="http://schemas.openxmlformats.org/presentationml/2006/main">
-  <p:cSld>
-    <p:spTree>
-      <p:nvGrpSpPr>
-        <p:cNvPr id="1" name=""/>
-        <p:cNvGrpSpPr/>
-        <p:nvPr/>
-      </p:nvGrpSpPr>
-      <p:grpSpPr>
-        <a:xfrm>
-          <a:off x="0" y="0"/>
-          <a:ext cx="0" cy="0"/>
-          <a:chOff x="0" y="0"/>
-          <a:chExt cx="0" cy="0"/>
-        </a:xfrm>
-      </p:grpSpPr>
-      <p:sp>
-        <p:nvSpPr>
-          <p:cNvPr id="2" name="Título 1"/>
-          <p:cNvSpPr>
-            <a:spLocks noGrp="1"/>
-          </p:cNvSpPr>
-          <p:nvPr>
-            <p:ph type="title"/>
-          </p:nvPr>
-        </p:nvSpPr>
-        <p:spPr/>
-        <p:txBody>
-          <a:bodyPr/>
-          <a:lstStyle/>
-          <a:p>
-            <a:r>
-              <a:rPr lang="en-US" dirty="0" smtClean="0"/>
-              <a:t>Objectives</a:t>
-            </a:r>
-            <a:endParaRPr lang="en-US" dirty="0"/>
-          </a:p>
-        </p:txBody>
-      </p:sp>
-      <p:sp>
-        <p:nvSpPr>
-          <p:cNvPr id="3" name="Marcador de contenido 2"/>
-          <p:cNvSpPr>
-            <a:spLocks noGrp="1"/>
-          </p:cNvSpPr>
-          <p:nvPr>
-            <p:ph idx="1"/>
-          </p:nvPr>
-        </p:nvSpPr>
-        <p:spPr/>
-        <p:txBody>
-          <a:bodyPr>
-            <a:normAutofit lnSpcReduction="10000"/>
-          </a:bodyPr>
-          <a:lstStyle/>
-          <a:p>
-            <a:pPr marL="514350" indent="-514350">
-              <a:buFont typeface="+mj-lt"/>
-              <a:buAutoNum type="arabicPeriod"/>
-            </a:pPr>
-            <a:r>
-              <a:rPr lang="en-US" dirty="0" smtClean="0"/>
-              <a:t>Determine germination patterns to main drivers in alpine communities</a:t>
-            </a:r>
-          </a:p>
-          <a:p>
-            <a:pPr marL="514350" indent="-514350">
-              <a:buFont typeface="+mj-lt"/>
-              <a:buAutoNum type="arabicPeriod"/>
-            </a:pPr>
-            <a:r>
-              <a:rPr lang="en-US" dirty="0" smtClean="0"/>
-              <a:t>Explore relationships between CM/CWM and microclimatic gradients</a:t>
-            </a:r>
-          </a:p>
-          <a:p>
-            <a:pPr marL="514350" indent="-514350">
-              <a:buFont typeface="+mj-lt"/>
-              <a:buAutoNum type="arabicPeriod"/>
-            </a:pPr>
-            <a:r>
-              <a:rPr lang="en-US" dirty="0" smtClean="0"/>
-              <a:t>Explore functional divergence (FD) in alpine communities</a:t>
-            </a:r>
-          </a:p>
-          <a:p>
-            <a:pPr marL="457200" lvl="1" indent="0">
-              <a:buNone/>
-            </a:pPr>
-            <a:r>
-              <a:rPr lang="en-US" dirty="0" smtClean="0"/>
-              <a:t>3.1. Compare germination and adult plant niche dissimilarities</a:t>
-            </a:r>
-          </a:p>
-          <a:p>
-            <a:pPr marL="457200" lvl="1" indent="0">
-              <a:buNone/>
-            </a:pPr>
-            <a:r>
-              <a:rPr lang="en-US" dirty="0" smtClean="0"/>
-              <a:t>3.2. Relationships between FD and microclimatic gradients</a:t>
-            </a:r>
-            <a:endParaRPr lang="en-US" dirty="0"/>
-          </a:p>
-          <a:p>
-            <a:pPr marL="457200" lvl="1" indent="0">
-              <a:buNone/>
-            </a:pPr>
-            <a:endParaRPr lang="en-US" dirty="0" smtClean="0"/>
-          </a:p>
-          <a:p>
-            <a:pPr marL="457200" lvl="1" indent="0">
-              <a:buNone/>
-            </a:pPr>
-            <a:endParaRPr lang="en-US" dirty="0"/>
-          </a:p>
-          <a:p>
-            <a:pPr marL="457200" lvl="1" indent="0">
-              <a:buNone/>
-            </a:pPr>
-            <a:r>
-              <a:rPr lang="en-US" dirty="0" smtClean="0">
-                <a:solidFill>
-                  <a:srgbClr val="FF0000"/>
-                </a:solidFill>
-              </a:rPr>
-              <a:t>Need of clear hypothesis to understand results and be able to compare it with literature.</a:t>
-            </a:r>
-          </a:p>
-        </p:txBody>
-      </p:sp>
-    </p:spTree>
-    <p:extLst>
-      <p:ext uri="{BB962C8B-B14F-4D97-AF65-F5344CB8AC3E}">
-        <p14:creationId xmlns:p14="http://schemas.microsoft.com/office/powerpoint/2010/main" val="97574445"/>
-      </p:ext>
-    </p:extLst>
-  </p:cSld>
-  <p:clrMapOvr>
-    <a:masterClrMapping/>
-  </p:clrMapOvr>
-</p:sld>
-</file>
-
-<file path=ppt/slides/slide6.xml><?xml version="1.0" encoding="utf-8"?>
-<p:sld xmlns:a="http://schemas.openxmlformats.org/drawingml/2006/main" xmlns:r="http://schemas.openxmlformats.org/officeDocument/2006/relationships" xmlns:p="http://schemas.openxmlformats.org/presentationml/2006/main">
-  <p:cSld>
-    <p:spTree>
-      <p:nvGrpSpPr>
-        <p:cNvPr id="1" name=""/>
-        <p:cNvGrpSpPr/>
-        <p:nvPr/>
-      </p:nvGrpSpPr>
-      <p:grpSpPr>
-        <a:xfrm>
-          <a:off x="0" y="0"/>
-          <a:ext cx="0" cy="0"/>
-          <a:chOff x="0" y="0"/>
-          <a:chExt cx="0" cy="0"/>
-        </a:xfrm>
-      </p:grpSpPr>
-      <p:sp>
-        <p:nvSpPr>
-          <p:cNvPr id="2" name="Título 1"/>
-          <p:cNvSpPr>
-            <a:spLocks noGrp="1"/>
-          </p:cNvSpPr>
-          <p:nvPr>
-            <p:ph type="title"/>
-          </p:nvPr>
-        </p:nvSpPr>
-        <p:spPr/>
-        <p:txBody>
-          <a:bodyPr/>
-          <a:lstStyle/>
-          <a:p>
-            <a:r>
-              <a:rPr lang="en-US" dirty="0" smtClean="0"/>
-              <a:t>Data availability</a:t>
-            </a:r>
-            <a:endParaRPr lang="en-US" dirty="0"/>
-          </a:p>
-        </p:txBody>
-      </p:sp>
-      <p:sp>
-        <p:nvSpPr>
-          <p:cNvPr id="3" name="Marcador de contenido 2"/>
-          <p:cNvSpPr>
-            <a:spLocks noGrp="1"/>
-          </p:cNvSpPr>
-          <p:nvPr>
-            <p:ph idx="1"/>
-          </p:nvPr>
-        </p:nvSpPr>
-        <p:spPr/>
-        <p:txBody>
-          <a:bodyPr/>
-          <a:lstStyle/>
-          <a:p>
-            <a:r>
-              <a:rPr lang="en-US" dirty="0" smtClean="0"/>
-              <a:t>8 functional traits:</a:t>
-            </a:r>
-          </a:p>
-          <a:p>
-            <a:pPr lvl="1"/>
-            <a:r>
-              <a:rPr lang="en-US" dirty="0" smtClean="0"/>
-              <a:t>3 germination responses to darkness, water stress and constant temperatures</a:t>
-            </a:r>
-          </a:p>
-          <a:p>
-            <a:pPr lvl="1"/>
-            <a:r>
-              <a:rPr lang="en-US" dirty="0" smtClean="0"/>
-              <a:t>5 adult traits extensively used:</a:t>
-            </a:r>
-          </a:p>
-          <a:p>
-            <a:pPr lvl="2"/>
-            <a:r>
-              <a:rPr lang="en-US" dirty="0" smtClean="0"/>
-              <a:t>Leaf area, plant height and seed mass (LHS scheme)</a:t>
-            </a:r>
-          </a:p>
-          <a:p>
-            <a:pPr lvl="2"/>
-            <a:r>
-              <a:rPr lang="en-US" dirty="0" smtClean="0"/>
-              <a:t>SLA and LDMC</a:t>
-            </a:r>
-          </a:p>
-          <a:p>
-            <a:endParaRPr lang="en-US" dirty="0" smtClean="0"/>
-          </a:p>
-          <a:p>
-            <a:r>
-              <a:rPr lang="en-US" dirty="0" smtClean="0"/>
-              <a:t>Species with full set of traits:</a:t>
-            </a:r>
-          </a:p>
-          <a:p>
-            <a:pPr lvl="1"/>
-            <a:r>
-              <a:rPr lang="en-US" dirty="0" smtClean="0"/>
-              <a:t>21 species in Mediterranean community</a:t>
-            </a:r>
-          </a:p>
-          <a:p>
-            <a:pPr lvl="1"/>
-            <a:r>
-              <a:rPr lang="en-US" dirty="0" smtClean="0"/>
-              <a:t>26 species in Temperate community</a:t>
-            </a:r>
-          </a:p>
-        </p:txBody>
-      </p:sp>
-    </p:spTree>
-    <p:extLst>
-      <p:ext uri="{BB962C8B-B14F-4D97-AF65-F5344CB8AC3E}">
-        <p14:creationId xmlns:p14="http://schemas.microsoft.com/office/powerpoint/2010/main" val="1492372542"/>
-      </p:ext>
-    </p:extLst>
-  </p:cSld>
-  <p:clrMapOvr>
-    <a:masterClrMapping/>
-  </p:clrMapOvr>
-</p:sld>
-</file>
-
-<file path=ppt/slides/slide7.xml><?xml version="1.0" encoding="utf-8"?>
-<p:sld xmlns:a="http://schemas.openxmlformats.org/drawingml/2006/main" xmlns:r="http://schemas.openxmlformats.org/officeDocument/2006/relationships" xmlns:p="http://schemas.openxmlformats.org/presentationml/2006/main">
-  <p:cSld>
-    <p:spTree>
-      <p:nvGrpSpPr>
-        <p:cNvPr id="1" name=""/>
-        <p:cNvGrpSpPr/>
-        <p:nvPr/>
-      </p:nvGrpSpPr>
-      <p:grpSpPr>
-        <a:xfrm>
-          <a:off x="0" y="0"/>
-          <a:ext cx="0" cy="0"/>
-          <a:chOff x="0" y="0"/>
-          <a:chExt cx="0" cy="0"/>
-        </a:xfrm>
-      </p:grpSpPr>
+          <a:p>
+            <a:r>
+              <a:rPr lang="en-US" dirty="0" smtClean="0"/>
+              <a:t>I will present preliminary results based on the most restrictive set of data.</a:t>
+            </a:r>
+          </a:p>
+          <a:p>
+            <a:r>
+              <a:rPr lang="en-US" dirty="0" smtClean="0"/>
+              <a:t>CWM is most used in literature for FD and community metrics</a:t>
+            </a:r>
+          </a:p>
+        </p:txBody>
+      </p:sp>
       <p:sp>
         <p:nvSpPr>
           <p:cNvPr id="2" name="Título 1"/>
@@ -5747,7 +5911,7 @@
             <p:ph idx="1"/>
             <p:extLst>
               <p:ext uri="{D42A27DB-BD31-4B8C-83A1-F6EECF244321}">
-                <p14:modId xmlns:p14="http://schemas.microsoft.com/office/powerpoint/2010/main" val="107523420"/>
+                <p14:modId xmlns:p14="http://schemas.microsoft.com/office/powerpoint/2010/main" val="1030031171"/>
               </p:ext>
             </p:extLst>
           </p:nvPr>
@@ -5817,7 +5981,11 @@
                     <a:p>
                       <a:r>
                         <a:rPr lang="en-US" dirty="0" smtClean="0"/>
-                        <a:t>Abundance data (&gt;80% cover of the plot with species traits)</a:t>
+                        <a:t>Abundance data (&gt;80% cover of the plot with species </a:t>
+                      </a:r>
+                      <a:r>
+                        <a:rPr lang="en-US" dirty="0" smtClean="0"/>
+                        <a:t>traits and at least 2 species)</a:t>
                       </a:r>
                       <a:endParaRPr lang="en-US" dirty="0"/>
                     </a:p>
@@ -5832,7 +6000,7 @@
                       <a:pPr algn="ctr"/>
                       <a:r>
                         <a:rPr lang="en-US" dirty="0" smtClean="0"/>
-                        <a:t>51</a:t>
+                        <a:t>48</a:t>
                       </a:r>
                       <a:endParaRPr lang="en-US" dirty="0"/>
                     </a:p>
@@ -5882,7 +6050,7 @@
                       <a:pPr algn="ctr"/>
                       <a:r>
                         <a:rPr lang="en-US" dirty="0" smtClean="0"/>
-                        <a:t>72</a:t>
+                        <a:t>70</a:t>
                       </a:r>
                       <a:endParaRPr lang="en-US" dirty="0"/>
                     </a:p>
@@ -5897,7 +6065,7 @@
                       <a:pPr algn="ctr"/>
                       <a:r>
                         <a:rPr lang="en-US" dirty="0" smtClean="0"/>
-                        <a:t>70</a:t>
+                        <a:t>68</a:t>
                       </a:r>
                       <a:endParaRPr lang="en-US" dirty="0"/>
                     </a:p>
@@ -5909,223 +6077,6 @@
           </a:graphicData>
         </a:graphic>
       </p:graphicFrame>
-      <p:sp>
-        <p:nvSpPr>
-          <p:cNvPr id="5" name="Marcador de contenido 2"/>
-          <p:cNvSpPr txBox="1">
-            <a:spLocks/>
-          </p:cNvSpPr>
-          <p:nvPr/>
-        </p:nvSpPr>
-        <p:spPr>
-          <a:xfrm>
-            <a:off x="838200" y="1825625"/>
-            <a:ext cx="10515600" cy="4351338"/>
-          </a:xfrm>
-          <a:prstGeom prst="rect">
-            <a:avLst/>
-          </a:prstGeom>
-        </p:spPr>
-        <p:txBody>
-          <a:bodyPr vert="horz" lIns="91440" tIns="45720" rIns="91440" bIns="45720" rtlCol="0">
-            <a:normAutofit/>
-          </a:bodyPr>
-          <a:lstStyle>
-            <a:lvl1pPr marL="228600" indent="-228600" algn="l" defTabSz="914400" rtl="0" eaLnBrk="1" latinLnBrk="0" hangingPunct="1">
-              <a:lnSpc>
-                <a:spcPct val="90000"/>
-              </a:lnSpc>
-              <a:spcBef>
-                <a:spcPts val="1000"/>
-              </a:spcBef>
-              <a:buFont typeface="Arial" panose="020B0604020202020204" pitchFamily="34" charset="0"/>
-              <a:buChar char="•"/>
-              <a:defRPr sz="2800" kern="1200">
-                <a:solidFill>
-                  <a:schemeClr val="tx1"/>
-                </a:solidFill>
-                <a:latin typeface="+mn-lt"/>
-                <a:ea typeface="+mn-ea"/>
-                <a:cs typeface="+mn-cs"/>
-              </a:defRPr>
-            </a:lvl1pPr>
-            <a:lvl2pPr marL="685800" indent="-228600" algn="l" defTabSz="914400" rtl="0" eaLnBrk="1" latinLnBrk="0" hangingPunct="1">
-              <a:lnSpc>
-                <a:spcPct val="90000"/>
-              </a:lnSpc>
-              <a:spcBef>
-                <a:spcPts val="500"/>
-              </a:spcBef>
-              <a:buFont typeface="Arial" panose="020B0604020202020204" pitchFamily="34" charset="0"/>
-              <a:buChar char="•"/>
-              <a:defRPr sz="2400" kern="1200">
-                <a:solidFill>
-                  <a:schemeClr val="tx1"/>
-                </a:solidFill>
-                <a:latin typeface="+mn-lt"/>
-                <a:ea typeface="+mn-ea"/>
-                <a:cs typeface="+mn-cs"/>
-              </a:defRPr>
-            </a:lvl2pPr>
-            <a:lvl3pPr marL="1143000" indent="-228600" algn="l" defTabSz="914400" rtl="0" eaLnBrk="1" latinLnBrk="0" hangingPunct="1">
-              <a:lnSpc>
-                <a:spcPct val="90000"/>
-              </a:lnSpc>
-              <a:spcBef>
-                <a:spcPts val="500"/>
-              </a:spcBef>
-              <a:buFont typeface="Arial" panose="020B0604020202020204" pitchFamily="34" charset="0"/>
-              <a:buChar char="•"/>
-              <a:defRPr sz="2000" kern="1200">
-                <a:solidFill>
-                  <a:schemeClr val="tx1"/>
-                </a:solidFill>
-                <a:latin typeface="+mn-lt"/>
-                <a:ea typeface="+mn-ea"/>
-                <a:cs typeface="+mn-cs"/>
-              </a:defRPr>
-            </a:lvl3pPr>
-            <a:lvl4pPr marL="1600200" indent="-228600" algn="l" defTabSz="914400" rtl="0" eaLnBrk="1" latinLnBrk="0" hangingPunct="1">
-              <a:lnSpc>
-                <a:spcPct val="90000"/>
-              </a:lnSpc>
-              <a:spcBef>
-                <a:spcPts val="500"/>
-              </a:spcBef>
-              <a:buFont typeface="Arial" panose="020B0604020202020204" pitchFamily="34" charset="0"/>
-              <a:buChar char="•"/>
-              <a:defRPr sz="1800" kern="1200">
-                <a:solidFill>
-                  <a:schemeClr val="tx1"/>
-                </a:solidFill>
-                <a:latin typeface="+mn-lt"/>
-                <a:ea typeface="+mn-ea"/>
-                <a:cs typeface="+mn-cs"/>
-              </a:defRPr>
-            </a:lvl4pPr>
-            <a:lvl5pPr marL="2057400" indent="-228600" algn="l" defTabSz="914400" rtl="0" eaLnBrk="1" latinLnBrk="0" hangingPunct="1">
-              <a:lnSpc>
-                <a:spcPct val="90000"/>
-              </a:lnSpc>
-              <a:spcBef>
-                <a:spcPts val="500"/>
-              </a:spcBef>
-              <a:buFont typeface="Arial" panose="020B0604020202020204" pitchFamily="34" charset="0"/>
-              <a:buChar char="•"/>
-              <a:defRPr sz="1800" kern="1200">
-                <a:solidFill>
-                  <a:schemeClr val="tx1"/>
-                </a:solidFill>
-                <a:latin typeface="+mn-lt"/>
-                <a:ea typeface="+mn-ea"/>
-                <a:cs typeface="+mn-cs"/>
-              </a:defRPr>
-            </a:lvl5pPr>
-            <a:lvl6pPr marL="2514600" indent="-228600" algn="l" defTabSz="914400" rtl="0" eaLnBrk="1" latinLnBrk="0" hangingPunct="1">
-              <a:lnSpc>
-                <a:spcPct val="90000"/>
-              </a:lnSpc>
-              <a:spcBef>
-                <a:spcPts val="500"/>
-              </a:spcBef>
-              <a:buFont typeface="Arial" panose="020B0604020202020204" pitchFamily="34" charset="0"/>
-              <a:buChar char="•"/>
-              <a:defRPr sz="1800" kern="1200">
-                <a:solidFill>
-                  <a:schemeClr val="tx1"/>
-                </a:solidFill>
-                <a:latin typeface="+mn-lt"/>
-                <a:ea typeface="+mn-ea"/>
-                <a:cs typeface="+mn-cs"/>
-              </a:defRPr>
-            </a:lvl6pPr>
-            <a:lvl7pPr marL="2971800" indent="-228600" algn="l" defTabSz="914400" rtl="0" eaLnBrk="1" latinLnBrk="0" hangingPunct="1">
-              <a:lnSpc>
-                <a:spcPct val="90000"/>
-              </a:lnSpc>
-              <a:spcBef>
-                <a:spcPts val="500"/>
-              </a:spcBef>
-              <a:buFont typeface="Arial" panose="020B0604020202020204" pitchFamily="34" charset="0"/>
-              <a:buChar char="•"/>
-              <a:defRPr sz="1800" kern="1200">
-                <a:solidFill>
-                  <a:schemeClr val="tx1"/>
-                </a:solidFill>
-                <a:latin typeface="+mn-lt"/>
-                <a:ea typeface="+mn-ea"/>
-                <a:cs typeface="+mn-cs"/>
-              </a:defRPr>
-            </a:lvl7pPr>
-            <a:lvl8pPr marL="3429000" indent="-228600" algn="l" defTabSz="914400" rtl="0" eaLnBrk="1" latinLnBrk="0" hangingPunct="1">
-              <a:lnSpc>
-                <a:spcPct val="90000"/>
-              </a:lnSpc>
-              <a:spcBef>
-                <a:spcPts val="500"/>
-              </a:spcBef>
-              <a:buFont typeface="Arial" panose="020B0604020202020204" pitchFamily="34" charset="0"/>
-              <a:buChar char="•"/>
-              <a:defRPr sz="1800" kern="1200">
-                <a:solidFill>
-                  <a:schemeClr val="tx1"/>
-                </a:solidFill>
-                <a:latin typeface="+mn-lt"/>
-                <a:ea typeface="+mn-ea"/>
-                <a:cs typeface="+mn-cs"/>
-              </a:defRPr>
-            </a:lvl8pPr>
-            <a:lvl9pPr marL="3886200" indent="-228600" algn="l" defTabSz="914400" rtl="0" eaLnBrk="1" latinLnBrk="0" hangingPunct="1">
-              <a:lnSpc>
-                <a:spcPct val="90000"/>
-              </a:lnSpc>
-              <a:spcBef>
-                <a:spcPts val="500"/>
-              </a:spcBef>
-              <a:buFont typeface="Arial" panose="020B0604020202020204" pitchFamily="34" charset="0"/>
-              <a:buChar char="•"/>
-              <a:defRPr sz="1800" kern="1200">
-                <a:solidFill>
-                  <a:schemeClr val="tx1"/>
-                </a:solidFill>
-                <a:latin typeface="+mn-lt"/>
-                <a:ea typeface="+mn-ea"/>
-                <a:cs typeface="+mn-cs"/>
-              </a:defRPr>
-            </a:lvl9pPr>
-          </a:lstStyle>
-          <a:p>
-            <a:r>
-              <a:rPr lang="en-US" dirty="0" smtClean="0"/>
-              <a:t>4 sites per community, 20 plots per site (N real= 75 and 78 )</a:t>
-            </a:r>
-          </a:p>
-          <a:p>
-            <a:endParaRPr lang="en-US" dirty="0"/>
-          </a:p>
-          <a:p>
-            <a:endParaRPr lang="en-US" dirty="0" smtClean="0"/>
-          </a:p>
-          <a:p>
-            <a:endParaRPr lang="en-US" dirty="0" smtClean="0"/>
-          </a:p>
-          <a:p>
-            <a:endParaRPr lang="en-US" dirty="0"/>
-          </a:p>
-          <a:p>
-            <a:r>
-              <a:rPr lang="en-US" dirty="0" smtClean="0"/>
-              <a:t>I will present preliminary results based on the most restrictive set of data.</a:t>
-            </a:r>
-          </a:p>
-          <a:p>
-            <a:r>
-              <a:rPr lang="en-US" dirty="0" smtClean="0"/>
-              <a:t>CWM is most used in literature for FD and community metrics</a:t>
-            </a:r>
-          </a:p>
-        </p:txBody>
-      </p:sp>
     </p:spTree>
     <p:extLst>
       <p:ext uri="{BB962C8B-B14F-4D97-AF65-F5344CB8AC3E}">
@@ -6158,7 +6109,7 @@
       </p:grpSpPr>
       <p:pic>
         <p:nvPicPr>
-          <p:cNvPr id="4" name="Marcador de contenido 3"/>
+          <p:cNvPr id="6" name="Marcador de contenido 5"/>
           <p:cNvPicPr>
             <a:picLocks noGrp="1" noChangeAspect="1"/>
           </p:cNvPicPr>
@@ -6166,7 +6117,7 @@
             <p:ph idx="1"/>
           </p:nvPr>
         </p:nvPicPr>
-        <p:blipFill rotWithShape="1">
+        <p:blipFill>
           <a:blip r:embed="rId2" cstate="print">
             <a:extLst>
               <a:ext uri="{28A0092B-C50C-407E-A947-70E740481C1C}">
@@ -6174,13 +6125,14 @@
               </a:ext>
             </a:extLst>
           </a:blip>
-          <a:srcRect t="8343"/>
-          <a:stretch/>
+          <a:stretch>
+            <a:fillRect/>
+          </a:stretch>
         </p:blipFill>
         <p:spPr>
           <a:xfrm>
-            <a:off x="1798546" y="1690688"/>
-            <a:ext cx="8594907" cy="3455230"/>
+            <a:off x="1160059" y="1399215"/>
+            <a:ext cx="8843750" cy="3906226"/>
           </a:xfrm>
         </p:spPr>
       </p:pic>
@@ -6231,13 +6183,13 @@
           <p:nvPr>
             <p:extLst>
               <p:ext uri="{D42A27DB-BD31-4B8C-83A1-F6EECF244321}">
-                <p14:modId xmlns:p14="http://schemas.microsoft.com/office/powerpoint/2010/main" val="2365209471"/>
+                <p14:modId xmlns:p14="http://schemas.microsoft.com/office/powerpoint/2010/main" val="1716222270"/>
               </p:ext>
             </p:extLst>
           </p:nvPr>
         </p:nvGraphicFramePr>
         <p:xfrm>
-          <a:off x="1273858" y="5203792"/>
+          <a:off x="1383040" y="5394774"/>
           <a:ext cx="8127999" cy="1463226"/>
         </p:xfrm>
         <a:graphic>
@@ -6316,7 +6268,11 @@
                       <a:pPr algn="ctr"/>
                       <a:r>
                         <a:rPr lang="en-US" sz="1200" dirty="0" smtClean="0"/>
-                        <a:t>2088 - 2157;      </a:t>
+                        <a:t>2091 </a:t>
+                      </a:r>
+                      <a:r>
+                        <a:rPr lang="en-US" sz="1200" dirty="0" smtClean="0"/>
+                        <a:t>- 2157;      </a:t>
                       </a:r>
                       <a:r>
                         <a:rPr lang="ca-ES" sz="1200" kern="1200" dirty="0" smtClean="0">
@@ -6420,7 +6376,13 @@
                         <a:rPr lang="ca-ES" sz="1200" kern="1200" dirty="0" smtClean="0">
                           <a:effectLst/>
                         </a:rPr>
-                        <a:t>x̄: 22</a:t>
+                        <a:t>x̄: </a:t>
+                      </a:r>
+                      <a:r>
+                        <a:rPr lang="ca-ES" sz="1200" kern="1200" dirty="0" smtClean="0">
+                          <a:effectLst/>
+                        </a:rPr>
+                        <a:t>23.2</a:t>
                       </a:r>
                       <a:endParaRPr lang="en-US" sz="1200" dirty="0"/>
                     </a:p>
@@ -6526,7 +6488,13 @@
                         <a:rPr lang="ca-ES" sz="1200" kern="1200" dirty="0" smtClean="0">
                           <a:effectLst/>
                         </a:rPr>
-                        <a:t>x̄: 1820</a:t>
+                        <a:t>x̄: </a:t>
+                      </a:r>
+                      <a:r>
+                        <a:rPr lang="ca-ES" sz="1200" kern="1200" dirty="0" smtClean="0">
+                          <a:effectLst/>
+                        </a:rPr>
+                        <a:t>1800</a:t>
                       </a:r>
                       <a:endParaRPr lang="en-US" sz="1200" dirty="0"/>
                     </a:p>
@@ -6600,7 +6568,13 @@
                         <a:rPr lang="ca-ES" sz="1200" kern="1200" dirty="0" smtClean="0">
                           <a:effectLst/>
                         </a:rPr>
-                        <a:t>0 – 145;              x̄: 31.8</a:t>
+                        <a:t>0 – 145;              x̄: </a:t>
+                      </a:r>
+                      <a:r>
+                        <a:rPr lang="ca-ES" sz="1200" kern="1200" dirty="0" smtClean="0">
+                          <a:effectLst/>
+                        </a:rPr>
+                        <a:t>32.5</a:t>
                       </a:r>
                       <a:endParaRPr lang="en-US" sz="1200" dirty="0"/>
                     </a:p>
@@ -6707,7 +6681,7 @@
       </p:sp>
       <p:pic>
         <p:nvPicPr>
-          <p:cNvPr id="4" name="Marcador de contenido 3"/>
+          <p:cNvPr id="5" name="Marcador de contenido 4"/>
           <p:cNvPicPr>
             <a:picLocks noGrp="1" noChangeAspect="1"/>
           </p:cNvPicPr>
@@ -6729,8 +6703,8 @@
         </p:blipFill>
         <p:spPr>
           <a:xfrm>
-            <a:off x="1852609" y="1825625"/>
-            <a:ext cx="8486782" cy="4351338"/>
+            <a:off x="1170254" y="1825625"/>
+            <a:ext cx="9851492" cy="4351338"/>
           </a:xfrm>
         </p:spPr>
       </p:pic>
